--- a/slides/master_defence.pptx
+++ b/slides/master_defence.pptx
@@ -5,54 +5,64 @@
     <p:sldMasterId id="2147483648" r:id="rId13"/>
   </p:sldMasterIdLst>
   <p:notesMasterIdLst>
-    <p:notesMasterId r:id="rId31"/>
+    <p:notesMasterId r:id="rId37"/>
   </p:notesMasterIdLst>
   <p:handoutMasterIdLst>
-    <p:handoutMasterId r:id="rId32"/>
+    <p:handoutMasterId r:id="rId38"/>
   </p:handoutMasterIdLst>
   <p:sldIdLst>
     <p:sldId id="261" r:id="rId14"/>
     <p:sldId id="262" r:id="rId15"/>
     <p:sldId id="258" r:id="rId16"/>
-    <p:sldId id="265" r:id="rId17"/>
-    <p:sldId id="267" r:id="rId18"/>
-    <p:sldId id="268" r:id="rId19"/>
-    <p:sldId id="269" r:id="rId20"/>
-    <p:sldId id="270" r:id="rId21"/>
-    <p:sldId id="271" r:id="rId22"/>
-    <p:sldId id="273" r:id="rId23"/>
-    <p:sldId id="274" r:id="rId24"/>
-    <p:sldId id="272" r:id="rId25"/>
-    <p:sldId id="276" r:id="rId26"/>
-    <p:sldId id="275" r:id="rId27"/>
-    <p:sldId id="266" r:id="rId28"/>
-    <p:sldId id="264" r:id="rId29"/>
-    <p:sldId id="260" r:id="rId30"/>
+    <p:sldId id="277" r:id="rId17"/>
+    <p:sldId id="278" r:id="rId18"/>
+    <p:sldId id="265" r:id="rId19"/>
+    <p:sldId id="279" r:id="rId20"/>
+    <p:sldId id="282" r:id="rId21"/>
+    <p:sldId id="280" r:id="rId22"/>
+    <p:sldId id="281" r:id="rId23"/>
+    <p:sldId id="267" r:id="rId24"/>
+    <p:sldId id="268" r:id="rId25"/>
+    <p:sldId id="269" r:id="rId26"/>
+    <p:sldId id="270" r:id="rId27"/>
+    <p:sldId id="271" r:id="rId28"/>
+    <p:sldId id="273" r:id="rId29"/>
+    <p:sldId id="274" r:id="rId30"/>
+    <p:sldId id="272" r:id="rId31"/>
+    <p:sldId id="276" r:id="rId32"/>
+    <p:sldId id="275" r:id="rId33"/>
+    <p:sldId id="266" r:id="rId34"/>
+    <p:sldId id="264" r:id="rId35"/>
+    <p:sldId id="260" r:id="rId36"/>
   </p:sldIdLst>
   <p:sldSz cx="12188825" cy="6858000"/>
   <p:notesSz cx="6797675" cy="9926638"/>
   <p:embeddedFontLst>
     <p:embeddedFont>
       <p:font typeface="AU Passata" panose="020B0604020202020204" charset="0"/>
-      <p:regular r:id="rId33"/>
-      <p:bold r:id="rId34"/>
+      <p:regular r:id="rId39"/>
+      <p:bold r:id="rId40"/>
     </p:embeddedFont>
     <p:embeddedFont>
       <p:font typeface="AU Passata Light" panose="020B0604020202020204" charset="0"/>
-      <p:regular r:id="rId35"/>
-      <p:bold r:id="rId36"/>
+      <p:regular r:id="rId41"/>
+      <p:bold r:id="rId42"/>
     </p:embeddedFont>
     <p:embeddedFont>
       <p:font typeface="AU Peto" panose="020B0604020202020204" charset="0"/>
-      <p:regular r:id="rId37"/>
-      <p:bold r:id="rId38"/>
+      <p:regular r:id="rId43"/>
+      <p:bold r:id="rId44"/>
+    </p:embeddedFont>
+    <p:embeddedFont>
+      <p:font typeface="Cambria Math" panose="02040503050406030204" pitchFamily="18" charset="0"/>
+      <p:regular r:id="rId45"/>
     </p:embeddedFont>
     <p:embeddedFont>
       <p:font typeface="Georgia" panose="02040502050405020303" pitchFamily="18" charset="0"/>
-      <p:regular r:id="rId39"/>
-      <p:bold r:id="rId40"/>
-      <p:italic r:id="rId41"/>
-      <p:boldItalic r:id="rId42"/>
+      <p:regular r:id="rId46"/>
+      <p:bold r:id="rId47"/>
+      <p:italic r:id="rId48"/>
+      <p:boldItalic r:id="rId49"/>
     </p:embeddedFont>
   </p:embeddedFontLst>
   <p:defaultTextStyle>
@@ -1099,7 +1109,7 @@
               <a:pPr>
                 <a:defRPr/>
               </a:pPr>
-              <a:t>17</a:t>
+              <a:t>23</a:t>
             </a:fld>
             <a:endParaRPr lang="en-GB" dirty="0"/>
           </a:p>
@@ -1158,7 +1168,7 @@
             <a:fld id="{78417F83-4CBA-48F2-BAD0-783AE3701E32}" type="datetimeFigureOut">
               <a:rPr lang="da-DK" smtClean="0"/>
               <a:pPr/>
-              <a:t>03-06-2026</a:t>
+              <a:t>06-06-2026</a:t>
             </a:fld>
             <a:endParaRPr lang="da-DK" dirty="0"/>
           </a:p>
@@ -2012,7 +2022,7 @@
             <a:fld id="{78417F83-4CBA-48F2-BAD0-783AE3701E32}" type="datetimeFigureOut">
               <a:rPr lang="da-DK" smtClean="0"/>
               <a:pPr/>
-              <a:t>03-06-2026</a:t>
+              <a:t>06-06-2026</a:t>
             </a:fld>
             <a:endParaRPr lang="da-DK" dirty="0"/>
           </a:p>
@@ -2250,7 +2260,7 @@
             <a:fld id="{78417F83-4CBA-48F2-BAD0-783AE3701E32}" type="datetimeFigureOut">
               <a:rPr lang="da-DK" smtClean="0"/>
               <a:pPr/>
-              <a:t>03-06-2026</a:t>
+              <a:t>06-06-2026</a:t>
             </a:fld>
             <a:endParaRPr lang="da-DK" dirty="0"/>
           </a:p>
@@ -2417,7 +2427,7 @@
             <a:fld id="{78417F83-4CBA-48F2-BAD0-783AE3701E32}" type="datetimeFigureOut">
               <a:rPr lang="da-DK" smtClean="0"/>
               <a:pPr/>
-              <a:t>03-06-2026</a:t>
+              <a:t>06-06-2026</a:t>
             </a:fld>
             <a:endParaRPr lang="da-DK" dirty="0"/>
           </a:p>
@@ -2588,7 +2598,7 @@
             <a:fld id="{78417F83-4CBA-48F2-BAD0-783AE3701E32}" type="datetimeFigureOut">
               <a:rPr lang="da-DK" smtClean="0"/>
               <a:pPr/>
-              <a:t>03-06-2026</a:t>
+              <a:t>06-06-2026</a:t>
             </a:fld>
             <a:endParaRPr lang="da-DK" dirty="0"/>
           </a:p>
@@ -2922,7 +2932,7 @@
             <a:fld id="{78417F83-4CBA-48F2-BAD0-783AE3701E32}" type="datetimeFigureOut">
               <a:rPr lang="da-DK" smtClean="0"/>
               <a:pPr/>
-              <a:t>03-06-2026</a:t>
+              <a:t>06-06-2026</a:t>
             </a:fld>
             <a:endParaRPr lang="da-DK" dirty="0"/>
           </a:p>
@@ -3090,7 +3100,7 @@
             <a:fld id="{78417F83-4CBA-48F2-BAD0-783AE3701E32}" type="datetimeFigureOut">
               <a:rPr lang="da-DK" smtClean="0"/>
               <a:pPr/>
-              <a:t>03-06-2026</a:t>
+              <a:t>06-06-2026</a:t>
             </a:fld>
             <a:endParaRPr lang="da-DK" dirty="0"/>
           </a:p>
@@ -3283,7 +3293,7 @@
             <a:fld id="{78417F83-4CBA-48F2-BAD0-783AE3701E32}" type="datetimeFigureOut">
               <a:rPr lang="da-DK" smtClean="0"/>
               <a:pPr/>
-              <a:t>03-06-2026</a:t>
+              <a:t>06-06-2026</a:t>
             </a:fld>
             <a:endParaRPr lang="da-DK" dirty="0"/>
           </a:p>
@@ -3449,7 +3459,7 @@
             <a:fld id="{78417F83-4CBA-48F2-BAD0-783AE3701E32}" type="datetimeFigureOut">
               <a:rPr lang="da-DK" smtClean="0"/>
               <a:pPr/>
-              <a:t>03-06-2026</a:t>
+              <a:t>06-06-2026</a:t>
             </a:fld>
             <a:endParaRPr lang="da-DK" dirty="0"/>
           </a:p>
@@ -3600,7 +3610,7 @@
             <a:fld id="{78417F83-4CBA-48F2-BAD0-783AE3701E32}" type="datetimeFigureOut">
               <a:rPr lang="da-DK" smtClean="0"/>
               <a:pPr/>
-              <a:t>03-06-2026</a:t>
+              <a:t>06-06-2026</a:t>
             </a:fld>
             <a:endParaRPr lang="da-DK" dirty="0"/>
           </a:p>
@@ -4486,7 +4496,7 @@
             <a:fld id="{78417F83-4CBA-48F2-BAD0-783AE3701E32}" type="datetimeFigureOut">
               <a:rPr lang="da-DK" smtClean="0"/>
               <a:pPr/>
-              <a:t>03-06-2026</a:t>
+              <a:t>06-06-2026</a:t>
             </a:fld>
             <a:endParaRPr lang="da-DK" dirty="0"/>
           </a:p>
@@ -4609,7 +4619,7 @@
             <a:fld id="{78417F83-4CBA-48F2-BAD0-783AE3701E32}" type="datetimeFigureOut">
               <a:rPr lang="da-DK" smtClean="0"/>
               <a:pPr/>
-              <a:t>03-06-2026</a:t>
+              <a:t>06-06-2026</a:t>
             </a:fld>
             <a:endParaRPr lang="da-DK" dirty="0"/>
           </a:p>
@@ -5415,7 +5425,7 @@
             <a:fld id="{78417F83-4CBA-48F2-BAD0-783AE3701E32}" type="datetimeFigureOut">
               <a:rPr lang="da-DK" smtClean="0"/>
               <a:pPr/>
-              <a:t>03-06-2026</a:t>
+              <a:t>06-06-2026</a:t>
             </a:fld>
             <a:endParaRPr lang="da-DK" dirty="0"/>
           </a:p>
@@ -5678,7 +5688,7 @@
             <a:fld id="{78417F83-4CBA-48F2-BAD0-783AE3701E32}" type="datetimeFigureOut">
               <a:rPr lang="da-DK" smtClean="0"/>
               <a:pPr/>
-              <a:t>03-06-2026</a:t>
+              <a:t>06-06-2026</a:t>
             </a:fld>
             <a:endParaRPr lang="da-DK" dirty="0"/>
           </a:p>
@@ -6573,7 +6583,7 @@
             <a:fld id="{78417F83-4CBA-48F2-BAD0-783AE3701E32}" type="datetimeFigureOut">
               <a:rPr lang="da-DK" smtClean="0"/>
               <a:pPr/>
-              <a:t>03-06-2026</a:t>
+              <a:t>06-06-2026</a:t>
             </a:fld>
             <a:endParaRPr lang="da-DK" dirty="0"/>
           </a:p>
@@ -6944,7 +6954,7 @@
             <a:fld id="{78417F83-4CBA-48F2-BAD0-783AE3701E32}" type="datetimeFigureOut">
               <a:rPr lang="da-DK" smtClean="0"/>
               <a:pPr/>
-              <a:t>03-06-2026</a:t>
+              <a:t>06-06-2026</a:t>
             </a:fld>
             <a:endParaRPr lang="da-DK" dirty="0"/>
           </a:p>
@@ -7368,7 +7378,7 @@
             <a:fld id="{78417F83-4CBA-48F2-BAD0-783AE3701E32}" type="datetimeFigureOut">
               <a:rPr lang="da-DK" smtClean="0"/>
               <a:pPr/>
-              <a:t>03-06-2026</a:t>
+              <a:t>06-06-2026</a:t>
             </a:fld>
             <a:endParaRPr lang="da-DK" dirty="0"/>
           </a:p>
@@ -7805,7 +7815,7 @@
             <a:fld id="{78417F83-4CBA-48F2-BAD0-783AE3701E32}" type="datetimeFigureOut">
               <a:rPr lang="da-DK" smtClean="0"/>
               <a:pPr/>
-              <a:t>03-06-2026</a:t>
+              <a:t>06-06-2026</a:t>
             </a:fld>
             <a:endParaRPr lang="da-DK" dirty="0"/>
           </a:p>
@@ -7970,7 +7980,7 @@
             <a:fld id="{78417F83-4CBA-48F2-BAD0-783AE3701E32}" type="datetimeFigureOut">
               <a:rPr lang="da-DK" smtClean="0"/>
               <a:pPr/>
-              <a:t>03-06-2026</a:t>
+              <a:t>06-06-2026</a:t>
             </a:fld>
             <a:endParaRPr lang="da-DK" dirty="0"/>
           </a:p>
@@ -8148,7 +8158,7 @@
             <a:fld id="{78417F83-4CBA-48F2-BAD0-783AE3701E32}" type="datetimeFigureOut">
               <a:rPr lang="da-DK" smtClean="0"/>
               <a:pPr/>
-              <a:t>03-06-2026</a:t>
+              <a:t>06-06-2026</a:t>
             </a:fld>
             <a:endParaRPr lang="da-DK" dirty="0"/>
           </a:p>
@@ -8259,7 +8269,7 @@
             <a:fld id="{78417F83-4CBA-48F2-BAD0-783AE3701E32}" type="datetimeFigureOut">
               <a:rPr lang="da-DK" smtClean="0"/>
               <a:pPr/>
-              <a:t>03-06-2026</a:t>
+              <a:t>06-06-2026</a:t>
             </a:fld>
             <a:endParaRPr lang="da-DK" dirty="0"/>
           </a:p>
@@ -9573,23 +9583,23 @@
               <a:t> </a:t>
             </a:r>
             <a:r>
-              <a:rPr lang="da-DK" sz="4000" b="0" i="1" u="sng" noProof="0" dirty="0"/>
+              <a:rPr lang="da-DK" sz="4000" b="0" i="1" noProof="0" dirty="0"/>
               <a:t>in inverse design of metal </a:t>
             </a:r>
             <a:r>
-              <a:rPr lang="da-DK" sz="4000" b="0" i="1" u="sng" noProof="0" dirty="0" err="1"/>
+              <a:rPr lang="da-DK" sz="4000" b="0" i="1" noProof="0" dirty="0" err="1"/>
               <a:t>alloy</a:t>
             </a:r>
             <a:r>
-              <a:rPr lang="da-DK" sz="4000" b="0" i="1" u="sng" noProof="0" dirty="0"/>
+              <a:rPr lang="da-DK" sz="4000" b="0" i="1" noProof="0" dirty="0"/>
               <a:t> </a:t>
             </a:r>
             <a:r>
-              <a:rPr lang="da-DK" sz="4000" b="0" i="1" u="sng" noProof="0" dirty="0" err="1"/>
+              <a:rPr lang="da-DK" sz="4000" b="0" i="1" noProof="0" dirty="0" err="1"/>
               <a:t>catalysts</a:t>
             </a:r>
             <a:r>
-              <a:rPr lang="da-DK" sz="4000" b="0" i="1" u="sng" noProof="0" dirty="0"/>
+              <a:rPr lang="da-DK" sz="4000" b="0" i="1" noProof="0" dirty="0"/>
               <a:t> </a:t>
             </a:r>
           </a:p>
@@ -9618,7 +9628,13 @@
   <p:cSld>
     <p:spTree>
       <p:nvGrpSpPr>
-        <p:cNvPr id="1" name=""/>
+        <p:cNvPr id="1" name="">
+          <a:extLst>
+            <a:ext uri="{FF2B5EF4-FFF2-40B4-BE49-F238E27FC236}">
+              <a16:creationId xmlns:a16="http://schemas.microsoft.com/office/drawing/2014/main" id="{122AE90B-AEAF-6C7C-FB10-C882345F1E76}"/>
+            </a:ext>
+          </a:extLst>
+        </p:cNvPr>
         <p:cNvGrpSpPr/>
         <p:nvPr/>
       </p:nvGrpSpPr>
@@ -9635,7 +9651,7 @@
           <p:cNvPr id="2" name="Titel 1">
             <a:extLst>
               <a:ext uri="{FF2B5EF4-FFF2-40B4-BE49-F238E27FC236}">
-                <a16:creationId xmlns:a16="http://schemas.microsoft.com/office/drawing/2014/main" id="{B140F199-A042-A46E-F368-31DBDB310CAD}"/>
+                <a16:creationId xmlns:a16="http://schemas.microsoft.com/office/drawing/2014/main" id="{7706F330-F7F9-8471-F989-9ECBC440C18F}"/>
               </a:ext>
             </a:extLst>
           </p:cNvPr>
@@ -9653,57 +9669,49 @@
           <a:p>
             <a:r>
               <a:rPr lang="da-DK" dirty="0"/>
-              <a:t>Main </a:t>
-            </a:r>
-            <a:r>
-              <a:rPr lang="da-DK" dirty="0" err="1"/>
-              <a:t>results</a:t>
-            </a:r>
-            <a:endParaRPr lang="da-DK" dirty="0"/>
-          </a:p>
-        </p:txBody>
-      </p:sp>
-      <p:pic>
-        <p:nvPicPr>
-          <p:cNvPr id="6" name="Pladsholder til indhold 5">
+              <a:t>Diffusion models</a:t>
+            </a:r>
+          </a:p>
+        </p:txBody>
+      </p:sp>
+      <p:sp>
+        <p:nvSpPr>
+          <p:cNvPr id="3" name="Pladsholder til indhold 2">
             <a:extLst>
               <a:ext uri="{FF2B5EF4-FFF2-40B4-BE49-F238E27FC236}">
-                <a16:creationId xmlns:a16="http://schemas.microsoft.com/office/drawing/2014/main" id="{98B36123-127C-563C-31D1-825991D01963}"/>
+                <a16:creationId xmlns:a16="http://schemas.microsoft.com/office/drawing/2014/main" id="{F32E9236-9127-6FC5-4EC2-8613A59E7B1E}"/>
               </a:ext>
             </a:extLst>
           </p:cNvPr>
-          <p:cNvPicPr>
-            <a:picLocks noGrp="1" noChangeAspect="1"/>
-          </p:cNvPicPr>
+          <p:cNvSpPr>
+            <a:spLocks noGrp="1"/>
+          </p:cNvSpPr>
           <p:nvPr>
             <p:ph idx="1"/>
           </p:nvPr>
-        </p:nvPicPr>
-        <p:blipFill>
-          <a:blip r:embed="rId2">
-            <a:extLst>
-              <a:ext uri="{96DAC541-7B7A-43D3-8B79-37D633B846F1}">
-                <asvg:svgBlip xmlns:asvg="http://schemas.microsoft.com/office/drawing/2016/SVG/main" r:embed="rId3"/>
-              </a:ext>
-            </a:extLst>
-          </a:blip>
-          <a:stretch>
-            <a:fillRect/>
-          </a:stretch>
-        </p:blipFill>
-        <p:spPr>
-          <a:xfrm>
-            <a:off x="1831134" y="1916832"/>
-            <a:ext cx="8526555" cy="4058492"/>
-          </a:xfrm>
-        </p:spPr>
-      </p:pic>
+        </p:nvSpPr>
+        <p:spPr/>
+        <p:txBody>
+          <a:bodyPr/>
+          <a:lstStyle/>
+          <a:p>
+            <a:pPr marL="342900" indent="-342900">
+              <a:buFont typeface="Arial" panose="020B0604020202020204" pitchFamily="34" charset="0"/>
+              <a:buChar char="•"/>
+            </a:pPr>
+            <a:r>
+              <a:rPr lang="da-DK" dirty="0"/>
+              <a:t>Diffusion models </a:t>
+            </a:r>
+          </a:p>
+        </p:txBody>
+      </p:sp>
       <p:sp>
         <p:nvSpPr>
           <p:cNvPr id="4" name="Pladsholder til dato 3">
             <a:extLst>
               <a:ext uri="{FF2B5EF4-FFF2-40B4-BE49-F238E27FC236}">
-                <a16:creationId xmlns:a16="http://schemas.microsoft.com/office/drawing/2014/main" id="{2026F97C-8AAC-A74C-893B-D64EF0EF4C74}"/>
+                <a16:creationId xmlns:a16="http://schemas.microsoft.com/office/drawing/2014/main" id="{97608109-FEB5-C23F-0A15-78EF70771FFC}"/>
               </a:ext>
             </a:extLst>
           </p:cNvPr>
@@ -9719,9 +9727,9 @@
           <a:bodyPr/>
           <a:lstStyle/>
           <a:p>
-            <a:fld id="{53A4AE42-1772-45EA-A5B5-4B60E900A53A}" type="datetime1">
+            <a:fld id="{580A9012-99F9-450D-B679-F272DDE9E7FC}" type="datetime1">
               <a:rPr lang="da-DK" smtClean="0"/>
-              <a:t>03-06-2026</a:t>
+              <a:t>06-06-2026</a:t>
             </a:fld>
             <a:endParaRPr lang="da-DK" dirty="0"/>
           </a:p>
@@ -9730,7 +9738,7 @@
     </p:spTree>
     <p:extLst>
       <p:ext uri="{BB962C8B-B14F-4D97-AF65-F5344CB8AC3E}">
-        <p14:creationId xmlns:p14="http://schemas.microsoft.com/office/powerpoint/2010/main" val="653694952"/>
+        <p14:creationId xmlns:p14="http://schemas.microsoft.com/office/powerpoint/2010/main" val="1001312394"/>
       </p:ext>
     </p:extLst>
   </p:cSld>
@@ -9762,7 +9770,7 @@
           <p:cNvPr id="2" name="Titel 1">
             <a:extLst>
               <a:ext uri="{FF2B5EF4-FFF2-40B4-BE49-F238E27FC236}">
-                <a16:creationId xmlns:a16="http://schemas.microsoft.com/office/drawing/2014/main" id="{B021288F-8536-FCF2-E1FD-D4263CEDABDF}"/>
+                <a16:creationId xmlns:a16="http://schemas.microsoft.com/office/drawing/2014/main" id="{BF9B3C35-F554-1BE5-0E63-C440F506EE41}"/>
               </a:ext>
             </a:extLst>
           </p:cNvPr>
@@ -9780,34 +9788,89 @@
           <a:p>
             <a:r>
               <a:rPr lang="da-DK" dirty="0"/>
-              <a:t>Main </a:t>
-            </a:r>
-            <a:r>
-              <a:rPr lang="da-DK" dirty="0" err="1"/>
-              <a:t>results</a:t>
-            </a:r>
+              <a:t>Diffusion models</a:t>
+            </a:r>
+          </a:p>
+        </p:txBody>
+      </p:sp>
+      <p:sp>
+        <p:nvSpPr>
+          <p:cNvPr id="3" name="Pladsholder til indhold 2">
+            <a:extLst>
+              <a:ext uri="{FF2B5EF4-FFF2-40B4-BE49-F238E27FC236}">
+                <a16:creationId xmlns:a16="http://schemas.microsoft.com/office/drawing/2014/main" id="{9776158E-1EA2-9F24-322A-49C2E0E529C4}"/>
+              </a:ext>
+            </a:extLst>
+          </p:cNvPr>
+          <p:cNvSpPr>
+            <a:spLocks noGrp="1"/>
+          </p:cNvSpPr>
+          <p:nvPr>
+            <p:ph idx="1"/>
+          </p:nvPr>
+        </p:nvSpPr>
+        <p:spPr>
+          <a:xfrm>
+            <a:off x="-5781790" y="1960079"/>
+            <a:ext cx="10220325" cy="3937484"/>
+          </a:xfrm>
+        </p:spPr>
+        <p:txBody>
+          <a:bodyPr/>
+          <a:lstStyle/>
+          <a:p>
+            <a:r>
+              <a:rPr lang="da-DK" dirty="0"/>
+              <a:t>hej</a:t>
+            </a:r>
+          </a:p>
+        </p:txBody>
+      </p:sp>
+      <p:sp>
+        <p:nvSpPr>
+          <p:cNvPr id="4" name="Pladsholder til dato 3">
+            <a:extLst>
+              <a:ext uri="{FF2B5EF4-FFF2-40B4-BE49-F238E27FC236}">
+                <a16:creationId xmlns:a16="http://schemas.microsoft.com/office/drawing/2014/main" id="{0B547133-81F5-C9E8-3878-3955A2601723}"/>
+              </a:ext>
+            </a:extLst>
+          </p:cNvPr>
+          <p:cNvSpPr>
+            <a:spLocks noGrp="1"/>
+          </p:cNvSpPr>
+          <p:nvPr>
+            <p:ph type="dt" sz="half" idx="10"/>
+          </p:nvPr>
+        </p:nvSpPr>
+        <p:spPr/>
+        <p:txBody>
+          <a:bodyPr/>
+          <a:lstStyle/>
+          <a:p>
+            <a:fld id="{87B16CDE-95A7-4B76-AC24-5DD1281AC3B4}" type="datetime1">
+              <a:rPr lang="da-DK" smtClean="0"/>
+              <a:t>06-06-2026</a:t>
+            </a:fld>
             <a:endParaRPr lang="da-DK" dirty="0"/>
           </a:p>
         </p:txBody>
       </p:sp>
       <p:pic>
         <p:nvPicPr>
-          <p:cNvPr id="6" name="Pladsholder til indhold 5" descr="Et billede, der indeholder skærmbillede, Farverigt, mønster, Parallel&#10;&#10;AI-genereret indhold kan være ukorrekt.">
+          <p:cNvPr id="78" name="Billede 77" descr="Et billede, der indeholder diagram, kvadratisk, tekst, linje/række&#10;&#10;AI-genereret indhold kan være ukorrekt.">
             <a:extLst>
               <a:ext uri="{FF2B5EF4-FFF2-40B4-BE49-F238E27FC236}">
-                <a16:creationId xmlns:a16="http://schemas.microsoft.com/office/drawing/2014/main" id="{3D8A6319-DE9A-721E-D2F5-D8FDF5DE9E2A}"/>
+                <a16:creationId xmlns:a16="http://schemas.microsoft.com/office/drawing/2014/main" id="{17BCA165-D6D5-AC6A-A955-0D094D81AFD5}"/>
               </a:ext>
             </a:extLst>
           </p:cNvPr>
           <p:cNvPicPr>
-            <a:picLocks noGrp="1" noChangeAspect="1"/>
+            <a:picLocks noChangeAspect="1"/>
           </p:cNvPicPr>
-          <p:nvPr>
-            <p:ph idx="1"/>
-          </p:nvPr>
+          <p:nvPr/>
         </p:nvPicPr>
         <p:blipFill>
-          <a:blip r:embed="rId2" cstate="print">
+          <a:blip r:embed="rId2">
             <a:extLst>
               <a:ext uri="{28A0092B-C50C-407E-A947-70E740481C1C}">
                 <a14:useLocalDpi xmlns:a14="http://schemas.microsoft.com/office/drawing/2010/main" val="0"/>
@@ -9820,44 +9883,18 @@
         </p:blipFill>
         <p:spPr>
           <a:xfrm>
-            <a:off x="4672113" y="476672"/>
-            <a:ext cx="7200800" cy="5280206"/>
-          </a:xfrm>
+            <a:off x="5878388" y="1186138"/>
+            <a:ext cx="5532222" cy="4702064"/>
+          </a:xfrm>
+          <a:prstGeom prst="rect">
+            <a:avLst/>
+          </a:prstGeom>
         </p:spPr>
       </p:pic>
-      <p:sp>
-        <p:nvSpPr>
-          <p:cNvPr id="4" name="Pladsholder til dato 3">
-            <a:extLst>
-              <a:ext uri="{FF2B5EF4-FFF2-40B4-BE49-F238E27FC236}">
-                <a16:creationId xmlns:a16="http://schemas.microsoft.com/office/drawing/2014/main" id="{8040D81A-6802-ABE8-6C47-6BD324EA2DA3}"/>
-              </a:ext>
-            </a:extLst>
-          </p:cNvPr>
-          <p:cNvSpPr>
-            <a:spLocks noGrp="1"/>
-          </p:cNvSpPr>
-          <p:nvPr>
-            <p:ph type="dt" sz="half" idx="10"/>
-          </p:nvPr>
-        </p:nvSpPr>
-        <p:spPr/>
-        <p:txBody>
-          <a:bodyPr/>
-          <a:lstStyle/>
-          <a:p>
-            <a:fld id="{562AACE8-395E-46D6-8C8D-296E9727DB83}" type="datetime1">
-              <a:rPr lang="da-DK" smtClean="0"/>
-              <a:t>03-06-2026</a:t>
-            </a:fld>
-            <a:endParaRPr lang="da-DK" dirty="0"/>
-          </a:p>
-        </p:txBody>
-      </p:sp>
     </p:spTree>
     <p:extLst>
       <p:ext uri="{BB962C8B-B14F-4D97-AF65-F5344CB8AC3E}">
-        <p14:creationId xmlns:p14="http://schemas.microsoft.com/office/powerpoint/2010/main" val="4003661533"/>
+        <p14:creationId xmlns:p14="http://schemas.microsoft.com/office/powerpoint/2010/main" val="301104243"/>
       </p:ext>
     </p:extLst>
   </p:cSld>
@@ -9889,7 +9926,7 @@
           <p:cNvPr id="2" name="Titel 1">
             <a:extLst>
               <a:ext uri="{FF2B5EF4-FFF2-40B4-BE49-F238E27FC236}">
-                <a16:creationId xmlns:a16="http://schemas.microsoft.com/office/drawing/2014/main" id="{C7DA86CF-BD7F-8BAD-F37C-56D8C90B2A3A}"/>
+                <a16:creationId xmlns:a16="http://schemas.microsoft.com/office/drawing/2014/main" id="{195C8842-1949-4DFC-AB19-D157177870D7}"/>
               </a:ext>
             </a:extLst>
           </p:cNvPr>
@@ -9906,14 +9943,35 @@
           <a:lstStyle/>
           <a:p>
             <a:r>
-              <a:rPr lang="da-DK" dirty="0"/>
-              <a:t>Main </a:t>
-            </a:r>
-            <a:r>
               <a:rPr lang="da-DK" dirty="0" err="1"/>
-              <a:t>results</a:t>
+              <a:t>Implementation</a:t>
             </a:r>
             <a:endParaRPr lang="da-DK" dirty="0"/>
+          </a:p>
+        </p:txBody>
+      </p:sp>
+      <p:sp>
+        <p:nvSpPr>
+          <p:cNvPr id="3" name="Pladsholder til indhold 2">
+            <a:extLst>
+              <a:ext uri="{FF2B5EF4-FFF2-40B4-BE49-F238E27FC236}">
+                <a16:creationId xmlns:a16="http://schemas.microsoft.com/office/drawing/2014/main" id="{964C60AF-409F-C091-E034-34F030FF3E99}"/>
+              </a:ext>
+            </a:extLst>
+          </p:cNvPr>
+          <p:cNvSpPr>
+            <a:spLocks noGrp="1"/>
+          </p:cNvSpPr>
+          <p:nvPr>
+            <p:ph idx="1"/>
+          </p:nvPr>
+        </p:nvSpPr>
+        <p:spPr/>
+        <p:txBody>
+          <a:bodyPr/>
+          <a:lstStyle/>
+          <a:p>
+            <a:endParaRPr lang="da-DK"/>
           </a:p>
         </p:txBody>
       </p:sp>
@@ -9922,7 +9980,7 @@
           <p:cNvPr id="4" name="Pladsholder til dato 3">
             <a:extLst>
               <a:ext uri="{FF2B5EF4-FFF2-40B4-BE49-F238E27FC236}">
-                <a16:creationId xmlns:a16="http://schemas.microsoft.com/office/drawing/2014/main" id="{FB3E12AA-BC4D-41DE-835F-57D27CC0CDEF}"/>
+                <a16:creationId xmlns:a16="http://schemas.microsoft.com/office/drawing/2014/main" id="{DB372499-358A-34C7-26AC-05C527148683}"/>
               </a:ext>
             </a:extLst>
           </p:cNvPr>
@@ -9938,35 +9996,10 @@
           <a:bodyPr/>
           <a:lstStyle/>
           <a:p>
-            <a:fld id="{6EA4D22D-4AFB-42AB-935A-CE7490742ECA}" type="datetime1">
+            <a:fld id="{CF7C4603-1403-47A3-A603-AFF51D07CC91}" type="datetime1">
               <a:rPr lang="da-DK" smtClean="0"/>
-              <a:t>03-06-2026</a:t>
+              <a:t>06-06-2026</a:t>
             </a:fld>
-            <a:endParaRPr lang="da-DK" dirty="0"/>
-          </a:p>
-        </p:txBody>
-      </p:sp>
-      <p:sp>
-        <p:nvSpPr>
-          <p:cNvPr id="27" name="Pladsholder til indhold 26">
-            <a:extLst>
-              <a:ext uri="{FF2B5EF4-FFF2-40B4-BE49-F238E27FC236}">
-                <a16:creationId xmlns:a16="http://schemas.microsoft.com/office/drawing/2014/main" id="{E956FF2D-CF12-02E2-C5CC-2F728B777DB8}"/>
-              </a:ext>
-            </a:extLst>
-          </p:cNvPr>
-          <p:cNvSpPr>
-            <a:spLocks noGrp="1"/>
-          </p:cNvSpPr>
-          <p:nvPr>
-            <p:ph idx="1"/>
-          </p:nvPr>
-        </p:nvSpPr>
-        <p:spPr/>
-        <p:txBody>
-          <a:bodyPr/>
-          <a:lstStyle/>
-          <a:p>
             <a:endParaRPr lang="da-DK" dirty="0"/>
           </a:p>
         </p:txBody>
@@ -9974,7 +10007,7 @@
     </p:spTree>
     <p:extLst>
       <p:ext uri="{BB962C8B-B14F-4D97-AF65-F5344CB8AC3E}">
-        <p14:creationId xmlns:p14="http://schemas.microsoft.com/office/powerpoint/2010/main" val="506151896"/>
+        <p14:creationId xmlns:p14="http://schemas.microsoft.com/office/powerpoint/2010/main" val="3355098787"/>
       </p:ext>
     </p:extLst>
   </p:cSld>
@@ -10006,7 +10039,7 @@
           <p:cNvPr id="2" name="Titel 1">
             <a:extLst>
               <a:ext uri="{FF2B5EF4-FFF2-40B4-BE49-F238E27FC236}">
-                <a16:creationId xmlns:a16="http://schemas.microsoft.com/office/drawing/2014/main" id="{13740FFF-1F42-D553-AEFB-89CC8BD5C53D}"/>
+                <a16:creationId xmlns:a16="http://schemas.microsoft.com/office/drawing/2014/main" id="{EA2C088B-3709-65DC-4E9C-28A4D35EE040}"/>
               </a:ext>
             </a:extLst>
           </p:cNvPr>
@@ -10022,41 +10055,59 @@
           <a:bodyPr/>
           <a:lstStyle/>
           <a:p>
-            <a:endParaRPr lang="da-DK"/>
-          </a:p>
-        </p:txBody>
-      </p:sp>
-      <p:sp>
-        <p:nvSpPr>
-          <p:cNvPr id="3" name="Pladsholder til indhold 2">
+            <a:r>
+              <a:rPr lang="da-DK" dirty="0"/>
+              <a:t>Main </a:t>
+            </a:r>
+            <a:r>
+              <a:rPr lang="da-DK" dirty="0" err="1"/>
+              <a:t>results</a:t>
+            </a:r>
+            <a:endParaRPr lang="da-DK" dirty="0"/>
+          </a:p>
+        </p:txBody>
+      </p:sp>
+      <p:pic>
+        <p:nvPicPr>
+          <p:cNvPr id="6" name="Pladsholder til indhold 5">
             <a:extLst>
               <a:ext uri="{FF2B5EF4-FFF2-40B4-BE49-F238E27FC236}">
-                <a16:creationId xmlns:a16="http://schemas.microsoft.com/office/drawing/2014/main" id="{944B0957-EBCD-3F19-DE3E-1221C84D06FD}"/>
+                <a16:creationId xmlns:a16="http://schemas.microsoft.com/office/drawing/2014/main" id="{374176C8-421A-FD43-BC1E-69BE45C36601}"/>
               </a:ext>
             </a:extLst>
           </p:cNvPr>
-          <p:cNvSpPr>
-            <a:spLocks noGrp="1"/>
-          </p:cNvSpPr>
+          <p:cNvPicPr>
+            <a:picLocks noGrp="1" noChangeAspect="1"/>
+          </p:cNvPicPr>
           <p:nvPr>
             <p:ph idx="1"/>
           </p:nvPr>
-        </p:nvSpPr>
-        <p:spPr/>
-        <p:txBody>
-          <a:bodyPr/>
-          <a:lstStyle/>
-          <a:p>
-            <a:endParaRPr lang="da-DK"/>
-          </a:p>
-        </p:txBody>
-      </p:sp>
+        </p:nvPicPr>
+        <p:blipFill>
+          <a:blip r:embed="rId2">
+            <a:extLst>
+              <a:ext uri="{96DAC541-7B7A-43D3-8B79-37D633B846F1}">
+                <asvg:svgBlip xmlns:asvg="http://schemas.microsoft.com/office/drawing/2016/SVG/main" r:embed="rId3"/>
+              </a:ext>
+            </a:extLst>
+          </a:blip>
+          <a:stretch>
+            <a:fillRect/>
+          </a:stretch>
+        </p:blipFill>
+        <p:spPr>
+          <a:xfrm>
+            <a:off x="1581812" y="1783259"/>
+            <a:ext cx="9025200" cy="4140000"/>
+          </a:xfrm>
+        </p:spPr>
+      </p:pic>
       <p:sp>
         <p:nvSpPr>
           <p:cNvPr id="4" name="Pladsholder til dato 3">
             <a:extLst>
               <a:ext uri="{FF2B5EF4-FFF2-40B4-BE49-F238E27FC236}">
-                <a16:creationId xmlns:a16="http://schemas.microsoft.com/office/drawing/2014/main" id="{24270D60-A9E0-2820-948D-DA48660D4B47}"/>
+                <a16:creationId xmlns:a16="http://schemas.microsoft.com/office/drawing/2014/main" id="{B1A29E85-380C-377D-79FA-DCF134530B7C}"/>
               </a:ext>
             </a:extLst>
           </p:cNvPr>
@@ -10072,9 +10123,9 @@
           <a:bodyPr/>
           <a:lstStyle/>
           <a:p>
-            <a:fld id="{CB4115A6-11E2-42A2-A1B8-7F60C35E1CC3}" type="datetime1">
+            <a:fld id="{BA25F783-37A3-4FDF-B0A4-3DCF78A1F576}" type="datetime1">
               <a:rPr lang="da-DK" smtClean="0"/>
-              <a:t>03-06-2026</a:t>
+              <a:t>06-06-2026</a:t>
             </a:fld>
             <a:endParaRPr lang="da-DK" dirty="0"/>
           </a:p>
@@ -10083,7 +10134,7 @@
     </p:spTree>
     <p:extLst>
       <p:ext uri="{BB962C8B-B14F-4D97-AF65-F5344CB8AC3E}">
-        <p14:creationId xmlns:p14="http://schemas.microsoft.com/office/powerpoint/2010/main" val="2617346416"/>
+        <p14:creationId xmlns:p14="http://schemas.microsoft.com/office/powerpoint/2010/main" val="32999733"/>
       </p:ext>
     </p:extLst>
   </p:cSld>
@@ -10115,7 +10166,7 @@
           <p:cNvPr id="2" name="Titel 1">
             <a:extLst>
               <a:ext uri="{FF2B5EF4-FFF2-40B4-BE49-F238E27FC236}">
-                <a16:creationId xmlns:a16="http://schemas.microsoft.com/office/drawing/2014/main" id="{F2B2447A-EF0A-AFC9-7F90-124EF3147715}"/>
+                <a16:creationId xmlns:a16="http://schemas.microsoft.com/office/drawing/2014/main" id="{C2DEF6AD-A162-8844-6DAC-171BA68FDA2A}"/>
               </a:ext>
             </a:extLst>
           </p:cNvPr>
@@ -10131,41 +10182,59 @@
           <a:bodyPr/>
           <a:lstStyle/>
           <a:p>
+            <a:r>
+              <a:rPr lang="da-DK" dirty="0"/>
+              <a:t>Main </a:t>
+            </a:r>
+            <a:r>
+              <a:rPr lang="da-DK" dirty="0" err="1"/>
+              <a:t>results</a:t>
+            </a:r>
             <a:endParaRPr lang="da-DK" dirty="0"/>
           </a:p>
         </p:txBody>
       </p:sp>
-      <p:sp>
-        <p:nvSpPr>
-          <p:cNvPr id="3" name="Pladsholder til indhold 2">
+      <p:pic>
+        <p:nvPicPr>
+          <p:cNvPr id="6" name="Pladsholder til indhold 5">
             <a:extLst>
               <a:ext uri="{FF2B5EF4-FFF2-40B4-BE49-F238E27FC236}">
-                <a16:creationId xmlns:a16="http://schemas.microsoft.com/office/drawing/2014/main" id="{26E6BA2F-CEC1-D8B5-6948-3668B261A889}"/>
+                <a16:creationId xmlns:a16="http://schemas.microsoft.com/office/drawing/2014/main" id="{B9C05493-EEB6-22D3-EC8D-8533DDC947FC}"/>
               </a:ext>
             </a:extLst>
           </p:cNvPr>
-          <p:cNvSpPr>
-            <a:spLocks noGrp="1"/>
-          </p:cNvSpPr>
+          <p:cNvPicPr>
+            <a:picLocks noGrp="1" noChangeAspect="1"/>
+          </p:cNvPicPr>
           <p:nvPr>
             <p:ph idx="1"/>
           </p:nvPr>
-        </p:nvSpPr>
-        <p:spPr/>
-        <p:txBody>
-          <a:bodyPr/>
-          <a:lstStyle/>
-          <a:p>
-            <a:endParaRPr lang="da-DK"/>
-          </a:p>
-        </p:txBody>
-      </p:sp>
+        </p:nvPicPr>
+        <p:blipFill>
+          <a:blip r:embed="rId2">
+            <a:extLst>
+              <a:ext uri="{96DAC541-7B7A-43D3-8B79-37D633B846F1}">
+                <asvg:svgBlip xmlns:asvg="http://schemas.microsoft.com/office/drawing/2016/SVG/main" r:embed="rId3"/>
+              </a:ext>
+            </a:extLst>
+          </a:blip>
+          <a:stretch>
+            <a:fillRect/>
+          </a:stretch>
+        </p:blipFill>
+        <p:spPr>
+          <a:xfrm>
+            <a:off x="1581812" y="1754194"/>
+            <a:ext cx="9025200" cy="4140000"/>
+          </a:xfrm>
+        </p:spPr>
+      </p:pic>
       <p:sp>
         <p:nvSpPr>
           <p:cNvPr id="4" name="Pladsholder til dato 3">
             <a:extLst>
               <a:ext uri="{FF2B5EF4-FFF2-40B4-BE49-F238E27FC236}">
-                <a16:creationId xmlns:a16="http://schemas.microsoft.com/office/drawing/2014/main" id="{D5D91462-8237-D031-49BF-13E0A66467BA}"/>
+                <a16:creationId xmlns:a16="http://schemas.microsoft.com/office/drawing/2014/main" id="{BFF45F53-A411-6297-F6D7-E20B6B2440DF}"/>
               </a:ext>
             </a:extLst>
           </p:cNvPr>
@@ -10181,9 +10250,9 @@
           <a:bodyPr/>
           <a:lstStyle/>
           <a:p>
-            <a:fld id="{671C7642-A9D5-491E-A962-F28AA5F860E1}" type="datetime1">
+            <a:fld id="{E7633D50-7C47-40EB-8713-EF433D7A7006}" type="datetime1">
               <a:rPr lang="da-DK" smtClean="0"/>
-              <a:t>03-06-2026</a:t>
+              <a:t>06-06-2026</a:t>
             </a:fld>
             <a:endParaRPr lang="da-DK" dirty="0"/>
           </a:p>
@@ -10192,7 +10261,7 @@
     </p:spTree>
     <p:extLst>
       <p:ext uri="{BB962C8B-B14F-4D97-AF65-F5344CB8AC3E}">
-        <p14:creationId xmlns:p14="http://schemas.microsoft.com/office/powerpoint/2010/main" val="4227067168"/>
+        <p14:creationId xmlns:p14="http://schemas.microsoft.com/office/powerpoint/2010/main" val="1408005184"/>
       </p:ext>
     </p:extLst>
   </p:cSld>
@@ -10224,7 +10293,7 @@
           <p:cNvPr id="2" name="Titel 1">
             <a:extLst>
               <a:ext uri="{FF2B5EF4-FFF2-40B4-BE49-F238E27FC236}">
-                <a16:creationId xmlns:a16="http://schemas.microsoft.com/office/drawing/2014/main" id="{BF59D87E-5BA0-EC5B-E545-E20BA1CBA0B3}"/>
+                <a16:creationId xmlns:a16="http://schemas.microsoft.com/office/drawing/2014/main" id="{958CD3DB-67AA-5CC4-15DE-4DA36502F4F9}"/>
               </a:ext>
             </a:extLst>
           </p:cNvPr>
@@ -10241,52 +10310,58 @@
           <a:lstStyle/>
           <a:p>
             <a:r>
+              <a:rPr lang="da-DK" dirty="0"/>
+              <a:t>Main </a:t>
+            </a:r>
+            <a:r>
               <a:rPr lang="da-DK" dirty="0" err="1"/>
-              <a:t>Concluding</a:t>
-            </a:r>
-            <a:r>
-              <a:rPr lang="da-DK" dirty="0"/>
-              <a:t> </a:t>
-            </a:r>
-            <a:r>
-              <a:rPr lang="da-DK" dirty="0" err="1"/>
-              <a:t>remarks</a:t>
+              <a:t>results</a:t>
             </a:r>
             <a:endParaRPr lang="da-DK" dirty="0"/>
           </a:p>
         </p:txBody>
       </p:sp>
-      <p:sp>
-        <p:nvSpPr>
-          <p:cNvPr id="3" name="Pladsholder til indhold 2">
+      <p:pic>
+        <p:nvPicPr>
+          <p:cNvPr id="6" name="Pladsholder til indhold 5" descr="Et billede, der indeholder tekst, skærmbillede, Farverigt, mønster&#10;&#10;AI-genereret indhold kan være ukorrekt.">
             <a:extLst>
               <a:ext uri="{FF2B5EF4-FFF2-40B4-BE49-F238E27FC236}">
-                <a16:creationId xmlns:a16="http://schemas.microsoft.com/office/drawing/2014/main" id="{4A57F6FA-66F8-A315-4442-0086DD41A8F3}"/>
+                <a16:creationId xmlns:a16="http://schemas.microsoft.com/office/drawing/2014/main" id="{825F58B0-C21A-9D2D-7655-7302687DF350}"/>
               </a:ext>
             </a:extLst>
           </p:cNvPr>
-          <p:cNvSpPr>
-            <a:spLocks noGrp="1"/>
-          </p:cNvSpPr>
+          <p:cNvPicPr>
+            <a:picLocks noGrp="1" noChangeAspect="1"/>
+          </p:cNvPicPr>
           <p:nvPr>
             <p:ph idx="1"/>
           </p:nvPr>
-        </p:nvSpPr>
-        <p:spPr/>
-        <p:txBody>
-          <a:bodyPr/>
-          <a:lstStyle/>
-          <a:p>
-            <a:endParaRPr lang="da-DK"/>
-          </a:p>
-        </p:txBody>
-      </p:sp>
+        </p:nvPicPr>
+        <p:blipFill>
+          <a:blip r:embed="rId2" cstate="print">
+            <a:extLst>
+              <a:ext uri="{28A0092B-C50C-407E-A947-70E740481C1C}">
+                <a14:useLocalDpi xmlns:a14="http://schemas.microsoft.com/office/drawing/2010/main" val="0"/>
+              </a:ext>
+            </a:extLst>
+          </a:blip>
+          <a:stretch>
+            <a:fillRect/>
+          </a:stretch>
+        </p:blipFill>
+        <p:spPr>
+          <a:xfrm>
+            <a:off x="5475889" y="332656"/>
+            <a:ext cx="5574208" cy="5901854"/>
+          </a:xfrm>
+        </p:spPr>
+      </p:pic>
       <p:sp>
         <p:nvSpPr>
           <p:cNvPr id="4" name="Pladsholder til dato 3">
             <a:extLst>
               <a:ext uri="{FF2B5EF4-FFF2-40B4-BE49-F238E27FC236}">
-                <a16:creationId xmlns:a16="http://schemas.microsoft.com/office/drawing/2014/main" id="{D827A06F-FB3D-2499-CA1B-CE264B0B4251}"/>
+                <a16:creationId xmlns:a16="http://schemas.microsoft.com/office/drawing/2014/main" id="{252A9DD3-49C7-D2B7-42DF-D5F1317CFDD8}"/>
               </a:ext>
             </a:extLst>
           </p:cNvPr>
@@ -10302,9 +10377,9 @@
           <a:bodyPr/>
           <a:lstStyle/>
           <a:p>
-            <a:fld id="{4F19E62D-215C-46BE-A0FB-CF6E4E6145B7}" type="datetime1">
+            <a:fld id="{C8BF3C83-0AF9-414D-934B-968BE636E83C}" type="datetime1">
               <a:rPr lang="da-DK" smtClean="0"/>
-              <a:t>03-06-2026</a:t>
+              <a:t>06-06-2026</a:t>
             </a:fld>
             <a:endParaRPr lang="da-DK" dirty="0"/>
           </a:p>
@@ -10313,7 +10388,7 @@
     </p:spTree>
     <p:extLst>
       <p:ext uri="{BB962C8B-B14F-4D97-AF65-F5344CB8AC3E}">
-        <p14:creationId xmlns:p14="http://schemas.microsoft.com/office/powerpoint/2010/main" val="1417750465"/>
+        <p14:creationId xmlns:p14="http://schemas.microsoft.com/office/powerpoint/2010/main" val="52301074"/>
       </p:ext>
     </p:extLst>
   </p:cSld>
@@ -10342,6 +10417,881 @@
       </p:grpSpPr>
       <p:sp>
         <p:nvSpPr>
+          <p:cNvPr id="2" name="Titel 1">
+            <a:extLst>
+              <a:ext uri="{FF2B5EF4-FFF2-40B4-BE49-F238E27FC236}">
+                <a16:creationId xmlns:a16="http://schemas.microsoft.com/office/drawing/2014/main" id="{B140F199-A042-A46E-F368-31DBDB310CAD}"/>
+              </a:ext>
+            </a:extLst>
+          </p:cNvPr>
+          <p:cNvSpPr>
+            <a:spLocks noGrp="1"/>
+          </p:cNvSpPr>
+          <p:nvPr>
+            <p:ph type="title"/>
+          </p:nvPr>
+        </p:nvSpPr>
+        <p:spPr/>
+        <p:txBody>
+          <a:bodyPr/>
+          <a:lstStyle/>
+          <a:p>
+            <a:r>
+              <a:rPr lang="da-DK" dirty="0"/>
+              <a:t>Main </a:t>
+            </a:r>
+            <a:r>
+              <a:rPr lang="da-DK" dirty="0" err="1"/>
+              <a:t>results</a:t>
+            </a:r>
+            <a:endParaRPr lang="da-DK" dirty="0"/>
+          </a:p>
+        </p:txBody>
+      </p:sp>
+      <p:pic>
+        <p:nvPicPr>
+          <p:cNvPr id="6" name="Pladsholder til indhold 5">
+            <a:extLst>
+              <a:ext uri="{FF2B5EF4-FFF2-40B4-BE49-F238E27FC236}">
+                <a16:creationId xmlns:a16="http://schemas.microsoft.com/office/drawing/2014/main" id="{98B36123-127C-563C-31D1-825991D01963}"/>
+              </a:ext>
+            </a:extLst>
+          </p:cNvPr>
+          <p:cNvPicPr>
+            <a:picLocks noGrp="1" noChangeAspect="1"/>
+          </p:cNvPicPr>
+          <p:nvPr>
+            <p:ph idx="1"/>
+          </p:nvPr>
+        </p:nvPicPr>
+        <p:blipFill>
+          <a:blip r:embed="rId2">
+            <a:extLst>
+              <a:ext uri="{96DAC541-7B7A-43D3-8B79-37D633B846F1}">
+                <asvg:svgBlip xmlns:asvg="http://schemas.microsoft.com/office/drawing/2016/SVG/main" r:embed="rId3"/>
+              </a:ext>
+            </a:extLst>
+          </a:blip>
+          <a:stretch>
+            <a:fillRect/>
+          </a:stretch>
+        </p:blipFill>
+        <p:spPr>
+          <a:xfrm>
+            <a:off x="1831134" y="1916832"/>
+            <a:ext cx="8526555" cy="4058492"/>
+          </a:xfrm>
+        </p:spPr>
+      </p:pic>
+      <p:sp>
+        <p:nvSpPr>
+          <p:cNvPr id="4" name="Pladsholder til dato 3">
+            <a:extLst>
+              <a:ext uri="{FF2B5EF4-FFF2-40B4-BE49-F238E27FC236}">
+                <a16:creationId xmlns:a16="http://schemas.microsoft.com/office/drawing/2014/main" id="{2026F97C-8AAC-A74C-893B-D64EF0EF4C74}"/>
+              </a:ext>
+            </a:extLst>
+          </p:cNvPr>
+          <p:cNvSpPr>
+            <a:spLocks noGrp="1"/>
+          </p:cNvSpPr>
+          <p:nvPr>
+            <p:ph type="dt" sz="half" idx="10"/>
+          </p:nvPr>
+        </p:nvSpPr>
+        <p:spPr/>
+        <p:txBody>
+          <a:bodyPr/>
+          <a:lstStyle/>
+          <a:p>
+            <a:fld id="{53A4AE42-1772-45EA-A5B5-4B60E900A53A}" type="datetime1">
+              <a:rPr lang="da-DK" smtClean="0"/>
+              <a:t>06-06-2026</a:t>
+            </a:fld>
+            <a:endParaRPr lang="da-DK" dirty="0"/>
+          </a:p>
+        </p:txBody>
+      </p:sp>
+    </p:spTree>
+    <p:extLst>
+      <p:ext uri="{BB962C8B-B14F-4D97-AF65-F5344CB8AC3E}">
+        <p14:creationId xmlns:p14="http://schemas.microsoft.com/office/powerpoint/2010/main" val="653694952"/>
+      </p:ext>
+    </p:extLst>
+  </p:cSld>
+  <p:clrMapOvr>
+    <a:masterClrMapping/>
+  </p:clrMapOvr>
+</p:sld>
+</file>
+
+<file path=ppt/slides/slide17.xml><?xml version="1.0" encoding="utf-8"?>
+<p:sld xmlns:a="http://schemas.openxmlformats.org/drawingml/2006/main" xmlns:r="http://schemas.openxmlformats.org/officeDocument/2006/relationships" xmlns:p="http://schemas.openxmlformats.org/presentationml/2006/main">
+  <p:cSld>
+    <p:spTree>
+      <p:nvGrpSpPr>
+        <p:cNvPr id="1" name=""/>
+        <p:cNvGrpSpPr/>
+        <p:nvPr/>
+      </p:nvGrpSpPr>
+      <p:grpSpPr>
+        <a:xfrm>
+          <a:off x="0" y="0"/>
+          <a:ext cx="0" cy="0"/>
+          <a:chOff x="0" y="0"/>
+          <a:chExt cx="0" cy="0"/>
+        </a:xfrm>
+      </p:grpSpPr>
+      <p:sp>
+        <p:nvSpPr>
+          <p:cNvPr id="2" name="Titel 1">
+            <a:extLst>
+              <a:ext uri="{FF2B5EF4-FFF2-40B4-BE49-F238E27FC236}">
+                <a16:creationId xmlns:a16="http://schemas.microsoft.com/office/drawing/2014/main" id="{B021288F-8536-FCF2-E1FD-D4263CEDABDF}"/>
+              </a:ext>
+            </a:extLst>
+          </p:cNvPr>
+          <p:cNvSpPr>
+            <a:spLocks noGrp="1"/>
+          </p:cNvSpPr>
+          <p:nvPr>
+            <p:ph type="title"/>
+          </p:nvPr>
+        </p:nvSpPr>
+        <p:spPr/>
+        <p:txBody>
+          <a:bodyPr/>
+          <a:lstStyle/>
+          <a:p>
+            <a:r>
+              <a:rPr lang="da-DK" dirty="0"/>
+              <a:t>Main </a:t>
+            </a:r>
+            <a:r>
+              <a:rPr lang="da-DK" dirty="0" err="1"/>
+              <a:t>results</a:t>
+            </a:r>
+            <a:endParaRPr lang="da-DK" dirty="0"/>
+          </a:p>
+        </p:txBody>
+      </p:sp>
+      <p:pic>
+        <p:nvPicPr>
+          <p:cNvPr id="6" name="Pladsholder til indhold 5" descr="Et billede, der indeholder skærmbillede, Farverigt, mønster, Parallel&#10;&#10;AI-genereret indhold kan være ukorrekt.">
+            <a:extLst>
+              <a:ext uri="{FF2B5EF4-FFF2-40B4-BE49-F238E27FC236}">
+                <a16:creationId xmlns:a16="http://schemas.microsoft.com/office/drawing/2014/main" id="{3D8A6319-DE9A-721E-D2F5-D8FDF5DE9E2A}"/>
+              </a:ext>
+            </a:extLst>
+          </p:cNvPr>
+          <p:cNvPicPr>
+            <a:picLocks noGrp="1" noChangeAspect="1"/>
+          </p:cNvPicPr>
+          <p:nvPr>
+            <p:ph idx="1"/>
+          </p:nvPr>
+        </p:nvPicPr>
+        <p:blipFill>
+          <a:blip r:embed="rId2" cstate="print">
+            <a:extLst>
+              <a:ext uri="{28A0092B-C50C-407E-A947-70E740481C1C}">
+                <a14:useLocalDpi xmlns:a14="http://schemas.microsoft.com/office/drawing/2010/main" val="0"/>
+              </a:ext>
+            </a:extLst>
+          </a:blip>
+          <a:stretch>
+            <a:fillRect/>
+          </a:stretch>
+        </p:blipFill>
+        <p:spPr>
+          <a:xfrm>
+            <a:off x="4672113" y="476672"/>
+            <a:ext cx="7200800" cy="5280206"/>
+          </a:xfrm>
+        </p:spPr>
+      </p:pic>
+      <p:sp>
+        <p:nvSpPr>
+          <p:cNvPr id="4" name="Pladsholder til dato 3">
+            <a:extLst>
+              <a:ext uri="{FF2B5EF4-FFF2-40B4-BE49-F238E27FC236}">
+                <a16:creationId xmlns:a16="http://schemas.microsoft.com/office/drawing/2014/main" id="{8040D81A-6802-ABE8-6C47-6BD324EA2DA3}"/>
+              </a:ext>
+            </a:extLst>
+          </p:cNvPr>
+          <p:cNvSpPr>
+            <a:spLocks noGrp="1"/>
+          </p:cNvSpPr>
+          <p:nvPr>
+            <p:ph type="dt" sz="half" idx="10"/>
+          </p:nvPr>
+        </p:nvSpPr>
+        <p:spPr/>
+        <p:txBody>
+          <a:bodyPr/>
+          <a:lstStyle/>
+          <a:p>
+            <a:fld id="{562AACE8-395E-46D6-8C8D-296E9727DB83}" type="datetime1">
+              <a:rPr lang="da-DK" smtClean="0"/>
+              <a:t>06-06-2026</a:t>
+            </a:fld>
+            <a:endParaRPr lang="da-DK" dirty="0"/>
+          </a:p>
+        </p:txBody>
+      </p:sp>
+    </p:spTree>
+    <p:extLst>
+      <p:ext uri="{BB962C8B-B14F-4D97-AF65-F5344CB8AC3E}">
+        <p14:creationId xmlns:p14="http://schemas.microsoft.com/office/powerpoint/2010/main" val="4003661533"/>
+      </p:ext>
+    </p:extLst>
+  </p:cSld>
+  <p:clrMapOvr>
+    <a:masterClrMapping/>
+  </p:clrMapOvr>
+</p:sld>
+</file>
+
+<file path=ppt/slides/slide18.xml><?xml version="1.0" encoding="utf-8"?>
+<p:sld xmlns:a="http://schemas.openxmlformats.org/drawingml/2006/main" xmlns:r="http://schemas.openxmlformats.org/officeDocument/2006/relationships" xmlns:p="http://schemas.openxmlformats.org/presentationml/2006/main">
+  <p:cSld>
+    <p:spTree>
+      <p:nvGrpSpPr>
+        <p:cNvPr id="1" name=""/>
+        <p:cNvGrpSpPr/>
+        <p:nvPr/>
+      </p:nvGrpSpPr>
+      <p:grpSpPr>
+        <a:xfrm>
+          <a:off x="0" y="0"/>
+          <a:ext cx="0" cy="0"/>
+          <a:chOff x="0" y="0"/>
+          <a:chExt cx="0" cy="0"/>
+        </a:xfrm>
+      </p:grpSpPr>
+      <p:sp>
+        <p:nvSpPr>
+          <p:cNvPr id="2" name="Titel 1">
+            <a:extLst>
+              <a:ext uri="{FF2B5EF4-FFF2-40B4-BE49-F238E27FC236}">
+                <a16:creationId xmlns:a16="http://schemas.microsoft.com/office/drawing/2014/main" id="{C7DA86CF-BD7F-8BAD-F37C-56D8C90B2A3A}"/>
+              </a:ext>
+            </a:extLst>
+          </p:cNvPr>
+          <p:cNvSpPr>
+            <a:spLocks noGrp="1"/>
+          </p:cNvSpPr>
+          <p:nvPr>
+            <p:ph type="title"/>
+          </p:nvPr>
+        </p:nvSpPr>
+        <p:spPr/>
+        <p:txBody>
+          <a:bodyPr/>
+          <a:lstStyle/>
+          <a:p>
+            <a:r>
+              <a:rPr lang="da-DK" dirty="0"/>
+              <a:t>Main </a:t>
+            </a:r>
+            <a:r>
+              <a:rPr lang="da-DK" dirty="0" err="1"/>
+              <a:t>results</a:t>
+            </a:r>
+            <a:endParaRPr lang="da-DK" dirty="0"/>
+          </a:p>
+        </p:txBody>
+      </p:sp>
+      <p:sp>
+        <p:nvSpPr>
+          <p:cNvPr id="4" name="Pladsholder til dato 3">
+            <a:extLst>
+              <a:ext uri="{FF2B5EF4-FFF2-40B4-BE49-F238E27FC236}">
+                <a16:creationId xmlns:a16="http://schemas.microsoft.com/office/drawing/2014/main" id="{FB3E12AA-BC4D-41DE-835F-57D27CC0CDEF}"/>
+              </a:ext>
+            </a:extLst>
+          </p:cNvPr>
+          <p:cNvSpPr>
+            <a:spLocks noGrp="1"/>
+          </p:cNvSpPr>
+          <p:nvPr>
+            <p:ph type="dt" sz="half" idx="10"/>
+          </p:nvPr>
+        </p:nvSpPr>
+        <p:spPr/>
+        <p:txBody>
+          <a:bodyPr/>
+          <a:lstStyle/>
+          <a:p>
+            <a:fld id="{6EA4D22D-4AFB-42AB-935A-CE7490742ECA}" type="datetime1">
+              <a:rPr lang="da-DK" smtClean="0"/>
+              <a:t>06-06-2026</a:t>
+            </a:fld>
+            <a:endParaRPr lang="da-DK" dirty="0"/>
+          </a:p>
+        </p:txBody>
+      </p:sp>
+      <p:sp>
+        <p:nvSpPr>
+          <p:cNvPr id="27" name="Pladsholder til indhold 26">
+            <a:extLst>
+              <a:ext uri="{FF2B5EF4-FFF2-40B4-BE49-F238E27FC236}">
+                <a16:creationId xmlns:a16="http://schemas.microsoft.com/office/drawing/2014/main" id="{E956FF2D-CF12-02E2-C5CC-2F728B777DB8}"/>
+              </a:ext>
+            </a:extLst>
+          </p:cNvPr>
+          <p:cNvSpPr>
+            <a:spLocks noGrp="1"/>
+          </p:cNvSpPr>
+          <p:nvPr>
+            <p:ph idx="1"/>
+          </p:nvPr>
+        </p:nvSpPr>
+        <p:spPr/>
+        <p:txBody>
+          <a:bodyPr/>
+          <a:lstStyle/>
+          <a:p>
+            <a:endParaRPr lang="da-DK" dirty="0"/>
+          </a:p>
+        </p:txBody>
+      </p:sp>
+    </p:spTree>
+    <p:extLst>
+      <p:ext uri="{BB962C8B-B14F-4D97-AF65-F5344CB8AC3E}">
+        <p14:creationId xmlns:p14="http://schemas.microsoft.com/office/powerpoint/2010/main" val="506151896"/>
+      </p:ext>
+    </p:extLst>
+  </p:cSld>
+  <p:clrMapOvr>
+    <a:masterClrMapping/>
+  </p:clrMapOvr>
+</p:sld>
+</file>
+
+<file path=ppt/slides/slide19.xml><?xml version="1.0" encoding="utf-8"?>
+<p:sld xmlns:a="http://schemas.openxmlformats.org/drawingml/2006/main" xmlns:r="http://schemas.openxmlformats.org/officeDocument/2006/relationships" xmlns:p="http://schemas.openxmlformats.org/presentationml/2006/main">
+  <p:cSld>
+    <p:spTree>
+      <p:nvGrpSpPr>
+        <p:cNvPr id="1" name=""/>
+        <p:cNvGrpSpPr/>
+        <p:nvPr/>
+      </p:nvGrpSpPr>
+      <p:grpSpPr>
+        <a:xfrm>
+          <a:off x="0" y="0"/>
+          <a:ext cx="0" cy="0"/>
+          <a:chOff x="0" y="0"/>
+          <a:chExt cx="0" cy="0"/>
+        </a:xfrm>
+      </p:grpSpPr>
+      <p:sp>
+        <p:nvSpPr>
+          <p:cNvPr id="2" name="Titel 1">
+            <a:extLst>
+              <a:ext uri="{FF2B5EF4-FFF2-40B4-BE49-F238E27FC236}">
+                <a16:creationId xmlns:a16="http://schemas.microsoft.com/office/drawing/2014/main" id="{13740FFF-1F42-D553-AEFB-89CC8BD5C53D}"/>
+              </a:ext>
+            </a:extLst>
+          </p:cNvPr>
+          <p:cNvSpPr>
+            <a:spLocks noGrp="1"/>
+          </p:cNvSpPr>
+          <p:nvPr>
+            <p:ph type="title"/>
+          </p:nvPr>
+        </p:nvSpPr>
+        <p:spPr/>
+        <p:txBody>
+          <a:bodyPr/>
+          <a:lstStyle/>
+          <a:p>
+            <a:endParaRPr lang="da-DK"/>
+          </a:p>
+        </p:txBody>
+      </p:sp>
+      <p:sp>
+        <p:nvSpPr>
+          <p:cNvPr id="3" name="Pladsholder til indhold 2">
+            <a:extLst>
+              <a:ext uri="{FF2B5EF4-FFF2-40B4-BE49-F238E27FC236}">
+                <a16:creationId xmlns:a16="http://schemas.microsoft.com/office/drawing/2014/main" id="{944B0957-EBCD-3F19-DE3E-1221C84D06FD}"/>
+              </a:ext>
+            </a:extLst>
+          </p:cNvPr>
+          <p:cNvSpPr>
+            <a:spLocks noGrp="1"/>
+          </p:cNvSpPr>
+          <p:nvPr>
+            <p:ph idx="1"/>
+          </p:nvPr>
+        </p:nvSpPr>
+        <p:spPr/>
+        <p:txBody>
+          <a:bodyPr/>
+          <a:lstStyle/>
+          <a:p>
+            <a:endParaRPr lang="da-DK"/>
+          </a:p>
+        </p:txBody>
+      </p:sp>
+      <p:sp>
+        <p:nvSpPr>
+          <p:cNvPr id="4" name="Pladsholder til dato 3">
+            <a:extLst>
+              <a:ext uri="{FF2B5EF4-FFF2-40B4-BE49-F238E27FC236}">
+                <a16:creationId xmlns:a16="http://schemas.microsoft.com/office/drawing/2014/main" id="{24270D60-A9E0-2820-948D-DA48660D4B47}"/>
+              </a:ext>
+            </a:extLst>
+          </p:cNvPr>
+          <p:cNvSpPr>
+            <a:spLocks noGrp="1"/>
+          </p:cNvSpPr>
+          <p:nvPr>
+            <p:ph type="dt" sz="half" idx="10"/>
+          </p:nvPr>
+        </p:nvSpPr>
+        <p:spPr/>
+        <p:txBody>
+          <a:bodyPr/>
+          <a:lstStyle/>
+          <a:p>
+            <a:fld id="{CB4115A6-11E2-42A2-A1B8-7F60C35E1CC3}" type="datetime1">
+              <a:rPr lang="da-DK" smtClean="0"/>
+              <a:t>06-06-2026</a:t>
+            </a:fld>
+            <a:endParaRPr lang="da-DK" dirty="0"/>
+          </a:p>
+        </p:txBody>
+      </p:sp>
+    </p:spTree>
+    <p:extLst>
+      <p:ext uri="{BB962C8B-B14F-4D97-AF65-F5344CB8AC3E}">
+        <p14:creationId xmlns:p14="http://schemas.microsoft.com/office/powerpoint/2010/main" val="2617346416"/>
+      </p:ext>
+    </p:extLst>
+  </p:cSld>
+  <p:clrMapOvr>
+    <a:masterClrMapping/>
+  </p:clrMapOvr>
+</p:sld>
+</file>
+
+<file path=ppt/slides/slide2.xml><?xml version="1.0" encoding="utf-8"?>
+<p:sld xmlns:a="http://schemas.openxmlformats.org/drawingml/2006/main" xmlns:r="http://schemas.openxmlformats.org/officeDocument/2006/relationships" xmlns:p="http://schemas.openxmlformats.org/presentationml/2006/main">
+  <p:cSld>
+    <p:spTree>
+      <p:nvGrpSpPr>
+        <p:cNvPr id="1" name=""/>
+        <p:cNvGrpSpPr/>
+        <p:nvPr/>
+      </p:nvGrpSpPr>
+      <p:grpSpPr>
+        <a:xfrm>
+          <a:off x="0" y="0"/>
+          <a:ext cx="0" cy="0"/>
+          <a:chOff x="0" y="0"/>
+          <a:chExt cx="0" cy="0"/>
+        </a:xfrm>
+      </p:grpSpPr>
+      <p:sp>
+        <p:nvSpPr>
+          <p:cNvPr id="3" name="Title 2"/>
+          <p:cNvSpPr>
+            <a:spLocks noGrp="1"/>
+          </p:cNvSpPr>
+          <p:nvPr>
+            <p:ph type="title"/>
+          </p:nvPr>
+        </p:nvSpPr>
+        <p:spPr/>
+        <p:txBody>
+          <a:bodyPr/>
+          <a:lstStyle/>
+          <a:p>
+            <a:r>
+              <a:rPr lang="da-DK" noProof="0" dirty="0" err="1"/>
+              <a:t>Outline</a:t>
+            </a:r>
+            <a:endParaRPr lang="da-DK" noProof="0" dirty="0"/>
+          </a:p>
+        </p:txBody>
+      </p:sp>
+      <p:sp>
+        <p:nvSpPr>
+          <p:cNvPr id="5" name="Content Placeholder 4"/>
+          <p:cNvSpPr>
+            <a:spLocks noGrp="1"/>
+          </p:cNvSpPr>
+          <p:nvPr>
+            <p:ph idx="1"/>
+          </p:nvPr>
+        </p:nvSpPr>
+        <p:spPr/>
+        <p:txBody>
+          <a:bodyPr/>
+          <a:lstStyle/>
+          <a:p>
+            <a:pPr marL="342900" indent="-342900">
+              <a:buFont typeface="Arial" panose="020B0604020202020204" pitchFamily="34" charset="0"/>
+              <a:buChar char="•"/>
+            </a:pPr>
+            <a:r>
+              <a:rPr lang="da-DK" dirty="0" err="1"/>
+              <a:t>Introduction</a:t>
+            </a:r>
+            <a:endParaRPr lang="da-DK" noProof="0" dirty="0"/>
+          </a:p>
+          <a:p>
+            <a:pPr marL="342900" indent="-342900">
+              <a:buFont typeface="Arial" panose="020B0604020202020204" pitchFamily="34" charset="0"/>
+              <a:buChar char="•"/>
+            </a:pPr>
+            <a:r>
+              <a:rPr lang="da-DK" noProof="0" dirty="0"/>
+              <a:t>Problem statement</a:t>
+            </a:r>
+          </a:p>
+          <a:p>
+            <a:pPr marL="342900" indent="-342900">
+              <a:buFont typeface="Arial" panose="020B0604020202020204" pitchFamily="34" charset="0"/>
+              <a:buChar char="•"/>
+            </a:pPr>
+            <a:r>
+              <a:rPr lang="da-DK" dirty="0"/>
+              <a:t>Diffusion models</a:t>
+            </a:r>
+          </a:p>
+          <a:p>
+            <a:pPr marL="342900" indent="-342900">
+              <a:buFont typeface="Arial" panose="020B0604020202020204" pitchFamily="34" charset="0"/>
+              <a:buChar char="•"/>
+            </a:pPr>
+            <a:r>
+              <a:rPr lang="da-DK" noProof="0" dirty="0" err="1"/>
+              <a:t>Implementation</a:t>
+            </a:r>
+            <a:endParaRPr lang="da-DK" noProof="0" dirty="0"/>
+          </a:p>
+          <a:p>
+            <a:pPr marL="342900" indent="-342900">
+              <a:buFont typeface="Arial" panose="020B0604020202020204" pitchFamily="34" charset="0"/>
+              <a:buChar char="•"/>
+            </a:pPr>
+            <a:r>
+              <a:rPr lang="da-DK" dirty="0"/>
+              <a:t>Main </a:t>
+            </a:r>
+            <a:r>
+              <a:rPr lang="da-DK" dirty="0" err="1"/>
+              <a:t>results</a:t>
+            </a:r>
+            <a:r>
+              <a:rPr lang="da-DK" dirty="0"/>
+              <a:t> &amp; </a:t>
+            </a:r>
+            <a:r>
+              <a:rPr lang="da-DK" dirty="0" err="1"/>
+              <a:t>discussion</a:t>
+            </a:r>
+            <a:endParaRPr lang="da-DK" dirty="0"/>
+          </a:p>
+          <a:p>
+            <a:pPr marL="342900" indent="-342900">
+              <a:buFont typeface="Arial" panose="020B0604020202020204" pitchFamily="34" charset="0"/>
+              <a:buChar char="•"/>
+            </a:pPr>
+            <a:r>
+              <a:rPr lang="da-DK" noProof="0" dirty="0" err="1"/>
+              <a:t>Concluding</a:t>
+            </a:r>
+            <a:r>
+              <a:rPr lang="da-DK" noProof="0" dirty="0"/>
+              <a:t> rem</a:t>
+            </a:r>
+            <a:r>
+              <a:rPr lang="da-DK" dirty="0"/>
+              <a:t>arks</a:t>
+            </a:r>
+            <a:endParaRPr lang="da-DK" noProof="0" dirty="0"/>
+          </a:p>
+          <a:p>
+            <a:pPr marL="342900" indent="-342900">
+              <a:buFont typeface="Arial" panose="020B0604020202020204" pitchFamily="34" charset="0"/>
+              <a:buChar char="•"/>
+            </a:pPr>
+            <a:endParaRPr lang="da-DK" noProof="0" dirty="0"/>
+          </a:p>
+        </p:txBody>
+      </p:sp>
+    </p:spTree>
+    <p:custDataLst>
+      <p:custData r:id="rId1"/>
+      <p:custData r:id="rId2"/>
+      <p:tags r:id="rId3"/>
+    </p:custDataLst>
+    <p:extLst>
+      <p:ext uri="{BB962C8B-B14F-4D97-AF65-F5344CB8AC3E}">
+        <p14:creationId xmlns:p14="http://schemas.microsoft.com/office/powerpoint/2010/main" val="2813365767"/>
+      </p:ext>
+    </p:extLst>
+  </p:cSld>
+  <p:clrMapOvr>
+    <a:masterClrMapping/>
+  </p:clrMapOvr>
+</p:sld>
+</file>
+
+<file path=ppt/slides/slide20.xml><?xml version="1.0" encoding="utf-8"?>
+<p:sld xmlns:a="http://schemas.openxmlformats.org/drawingml/2006/main" xmlns:r="http://schemas.openxmlformats.org/officeDocument/2006/relationships" xmlns:p="http://schemas.openxmlformats.org/presentationml/2006/main">
+  <p:cSld>
+    <p:spTree>
+      <p:nvGrpSpPr>
+        <p:cNvPr id="1" name=""/>
+        <p:cNvGrpSpPr/>
+        <p:nvPr/>
+      </p:nvGrpSpPr>
+      <p:grpSpPr>
+        <a:xfrm>
+          <a:off x="0" y="0"/>
+          <a:ext cx="0" cy="0"/>
+          <a:chOff x="0" y="0"/>
+          <a:chExt cx="0" cy="0"/>
+        </a:xfrm>
+      </p:grpSpPr>
+      <p:sp>
+        <p:nvSpPr>
+          <p:cNvPr id="2" name="Titel 1">
+            <a:extLst>
+              <a:ext uri="{FF2B5EF4-FFF2-40B4-BE49-F238E27FC236}">
+                <a16:creationId xmlns:a16="http://schemas.microsoft.com/office/drawing/2014/main" id="{F2B2447A-EF0A-AFC9-7F90-124EF3147715}"/>
+              </a:ext>
+            </a:extLst>
+          </p:cNvPr>
+          <p:cNvSpPr>
+            <a:spLocks noGrp="1"/>
+          </p:cNvSpPr>
+          <p:nvPr>
+            <p:ph type="title"/>
+          </p:nvPr>
+        </p:nvSpPr>
+        <p:spPr/>
+        <p:txBody>
+          <a:bodyPr/>
+          <a:lstStyle/>
+          <a:p>
+            <a:endParaRPr lang="da-DK" dirty="0"/>
+          </a:p>
+        </p:txBody>
+      </p:sp>
+      <p:sp>
+        <p:nvSpPr>
+          <p:cNvPr id="3" name="Pladsholder til indhold 2">
+            <a:extLst>
+              <a:ext uri="{FF2B5EF4-FFF2-40B4-BE49-F238E27FC236}">
+                <a16:creationId xmlns:a16="http://schemas.microsoft.com/office/drawing/2014/main" id="{26E6BA2F-CEC1-D8B5-6948-3668B261A889}"/>
+              </a:ext>
+            </a:extLst>
+          </p:cNvPr>
+          <p:cNvSpPr>
+            <a:spLocks noGrp="1"/>
+          </p:cNvSpPr>
+          <p:nvPr>
+            <p:ph idx="1"/>
+          </p:nvPr>
+        </p:nvSpPr>
+        <p:spPr/>
+        <p:txBody>
+          <a:bodyPr/>
+          <a:lstStyle/>
+          <a:p>
+            <a:endParaRPr lang="da-DK"/>
+          </a:p>
+        </p:txBody>
+      </p:sp>
+      <p:sp>
+        <p:nvSpPr>
+          <p:cNvPr id="4" name="Pladsholder til dato 3">
+            <a:extLst>
+              <a:ext uri="{FF2B5EF4-FFF2-40B4-BE49-F238E27FC236}">
+                <a16:creationId xmlns:a16="http://schemas.microsoft.com/office/drawing/2014/main" id="{D5D91462-8237-D031-49BF-13E0A66467BA}"/>
+              </a:ext>
+            </a:extLst>
+          </p:cNvPr>
+          <p:cNvSpPr>
+            <a:spLocks noGrp="1"/>
+          </p:cNvSpPr>
+          <p:nvPr>
+            <p:ph type="dt" sz="half" idx="10"/>
+          </p:nvPr>
+        </p:nvSpPr>
+        <p:spPr/>
+        <p:txBody>
+          <a:bodyPr/>
+          <a:lstStyle/>
+          <a:p>
+            <a:fld id="{671C7642-A9D5-491E-A962-F28AA5F860E1}" type="datetime1">
+              <a:rPr lang="da-DK" smtClean="0"/>
+              <a:t>06-06-2026</a:t>
+            </a:fld>
+            <a:endParaRPr lang="da-DK" dirty="0"/>
+          </a:p>
+        </p:txBody>
+      </p:sp>
+    </p:spTree>
+    <p:extLst>
+      <p:ext uri="{BB962C8B-B14F-4D97-AF65-F5344CB8AC3E}">
+        <p14:creationId xmlns:p14="http://schemas.microsoft.com/office/powerpoint/2010/main" val="4227067168"/>
+      </p:ext>
+    </p:extLst>
+  </p:cSld>
+  <p:clrMapOvr>
+    <a:masterClrMapping/>
+  </p:clrMapOvr>
+</p:sld>
+</file>
+
+<file path=ppt/slides/slide21.xml><?xml version="1.0" encoding="utf-8"?>
+<p:sld xmlns:a="http://schemas.openxmlformats.org/drawingml/2006/main" xmlns:r="http://schemas.openxmlformats.org/officeDocument/2006/relationships" xmlns:p="http://schemas.openxmlformats.org/presentationml/2006/main">
+  <p:cSld>
+    <p:spTree>
+      <p:nvGrpSpPr>
+        <p:cNvPr id="1" name=""/>
+        <p:cNvGrpSpPr/>
+        <p:nvPr/>
+      </p:nvGrpSpPr>
+      <p:grpSpPr>
+        <a:xfrm>
+          <a:off x="0" y="0"/>
+          <a:ext cx="0" cy="0"/>
+          <a:chOff x="0" y="0"/>
+          <a:chExt cx="0" cy="0"/>
+        </a:xfrm>
+      </p:grpSpPr>
+      <p:sp>
+        <p:nvSpPr>
+          <p:cNvPr id="2" name="Titel 1">
+            <a:extLst>
+              <a:ext uri="{FF2B5EF4-FFF2-40B4-BE49-F238E27FC236}">
+                <a16:creationId xmlns:a16="http://schemas.microsoft.com/office/drawing/2014/main" id="{BF59D87E-5BA0-EC5B-E545-E20BA1CBA0B3}"/>
+              </a:ext>
+            </a:extLst>
+          </p:cNvPr>
+          <p:cNvSpPr>
+            <a:spLocks noGrp="1"/>
+          </p:cNvSpPr>
+          <p:nvPr>
+            <p:ph type="title"/>
+          </p:nvPr>
+        </p:nvSpPr>
+        <p:spPr/>
+        <p:txBody>
+          <a:bodyPr/>
+          <a:lstStyle/>
+          <a:p>
+            <a:r>
+              <a:rPr lang="da-DK" dirty="0" err="1"/>
+              <a:t>Concluding</a:t>
+            </a:r>
+            <a:r>
+              <a:rPr lang="da-DK" dirty="0"/>
+              <a:t> </a:t>
+            </a:r>
+            <a:r>
+              <a:rPr lang="da-DK" dirty="0" err="1"/>
+              <a:t>remarks</a:t>
+            </a:r>
+            <a:endParaRPr lang="da-DK" dirty="0"/>
+          </a:p>
+        </p:txBody>
+      </p:sp>
+      <p:sp>
+        <p:nvSpPr>
+          <p:cNvPr id="3" name="Pladsholder til indhold 2">
+            <a:extLst>
+              <a:ext uri="{FF2B5EF4-FFF2-40B4-BE49-F238E27FC236}">
+                <a16:creationId xmlns:a16="http://schemas.microsoft.com/office/drawing/2014/main" id="{4A57F6FA-66F8-A315-4442-0086DD41A8F3}"/>
+              </a:ext>
+            </a:extLst>
+          </p:cNvPr>
+          <p:cNvSpPr>
+            <a:spLocks noGrp="1"/>
+          </p:cNvSpPr>
+          <p:nvPr>
+            <p:ph idx="1"/>
+          </p:nvPr>
+        </p:nvSpPr>
+        <p:spPr/>
+        <p:txBody>
+          <a:bodyPr/>
+          <a:lstStyle/>
+          <a:p>
+            <a:endParaRPr lang="da-DK"/>
+          </a:p>
+        </p:txBody>
+      </p:sp>
+      <p:sp>
+        <p:nvSpPr>
+          <p:cNvPr id="4" name="Pladsholder til dato 3">
+            <a:extLst>
+              <a:ext uri="{FF2B5EF4-FFF2-40B4-BE49-F238E27FC236}">
+                <a16:creationId xmlns:a16="http://schemas.microsoft.com/office/drawing/2014/main" id="{D827A06F-FB3D-2499-CA1B-CE264B0B4251}"/>
+              </a:ext>
+            </a:extLst>
+          </p:cNvPr>
+          <p:cNvSpPr>
+            <a:spLocks noGrp="1"/>
+          </p:cNvSpPr>
+          <p:nvPr>
+            <p:ph type="dt" sz="half" idx="10"/>
+          </p:nvPr>
+        </p:nvSpPr>
+        <p:spPr/>
+        <p:txBody>
+          <a:bodyPr/>
+          <a:lstStyle/>
+          <a:p>
+            <a:fld id="{4F19E62D-215C-46BE-A0FB-CF6E4E6145B7}" type="datetime1">
+              <a:rPr lang="da-DK" smtClean="0"/>
+              <a:t>06-06-2026</a:t>
+            </a:fld>
+            <a:endParaRPr lang="da-DK" dirty="0"/>
+          </a:p>
+        </p:txBody>
+      </p:sp>
+    </p:spTree>
+    <p:extLst>
+      <p:ext uri="{BB962C8B-B14F-4D97-AF65-F5344CB8AC3E}">
+        <p14:creationId xmlns:p14="http://schemas.microsoft.com/office/powerpoint/2010/main" val="1417750465"/>
+      </p:ext>
+    </p:extLst>
+  </p:cSld>
+  <p:clrMapOvr>
+    <a:masterClrMapping/>
+  </p:clrMapOvr>
+</p:sld>
+</file>
+
+<file path=ppt/slides/slide22.xml><?xml version="1.0" encoding="utf-8"?>
+<p:sld xmlns:a="http://schemas.openxmlformats.org/drawingml/2006/main" xmlns:r="http://schemas.openxmlformats.org/officeDocument/2006/relationships" xmlns:p="http://schemas.openxmlformats.org/presentationml/2006/main">
+  <p:cSld>
+    <p:spTree>
+      <p:nvGrpSpPr>
+        <p:cNvPr id="1" name=""/>
+        <p:cNvGrpSpPr/>
+        <p:nvPr/>
+      </p:nvGrpSpPr>
+      <p:grpSpPr>
+        <a:xfrm>
+          <a:off x="0" y="0"/>
+          <a:ext cx="0" cy="0"/>
+          <a:chOff x="0" y="0"/>
+          <a:chExt cx="0" cy="0"/>
+        </a:xfrm>
+      </p:grpSpPr>
+      <p:sp>
+        <p:nvSpPr>
           <p:cNvPr id="2" name="Date Placeholder 1"/>
           <p:cNvSpPr>
             <a:spLocks noGrp="1"/>
@@ -10357,7 +11307,7 @@
           <a:p>
             <a:fld id="{EBD85B7D-E9A5-49E0-8ACF-AF93CE3E556F}" type="datetime1">
               <a:rPr lang="da-DK" noProof="0" smtClean="0"/>
-              <a:t>03-06-2026</a:t>
+              <a:t>06-06-2026</a:t>
             </a:fld>
             <a:endParaRPr lang="da-DK" noProof="0" dirty="0"/>
           </a:p>
@@ -10412,7 +11362,7 @@
 </p:sld>
 </file>
 
-<file path=ppt/slides/slide17.xml><?xml version="1.0" encoding="utf-8"?>
+<file path=ppt/slides/slide23.xml><?xml version="1.0" encoding="utf-8"?>
 <p:sld xmlns:a="http://schemas.openxmlformats.org/drawingml/2006/main" xmlns:r="http://schemas.openxmlformats.org/officeDocument/2006/relationships" xmlns:p="http://schemas.openxmlformats.org/presentationml/2006/main">
   <p:cSld>
     <p:spTree>
@@ -10447,171 +11397,6 @@
 </p:sld>
 </file>
 
-<file path=ppt/slides/slide2.xml><?xml version="1.0" encoding="utf-8"?>
-<p:sld xmlns:a="http://schemas.openxmlformats.org/drawingml/2006/main" xmlns:r="http://schemas.openxmlformats.org/officeDocument/2006/relationships" xmlns:p="http://schemas.openxmlformats.org/presentationml/2006/main">
-  <p:cSld>
-    <p:spTree>
-      <p:nvGrpSpPr>
-        <p:cNvPr id="1" name=""/>
-        <p:cNvGrpSpPr/>
-        <p:nvPr/>
-      </p:nvGrpSpPr>
-      <p:grpSpPr>
-        <a:xfrm>
-          <a:off x="0" y="0"/>
-          <a:ext cx="0" cy="0"/>
-          <a:chOff x="0" y="0"/>
-          <a:chExt cx="0" cy="0"/>
-        </a:xfrm>
-      </p:grpSpPr>
-      <p:sp>
-        <p:nvSpPr>
-          <p:cNvPr id="3" name="Title 2"/>
-          <p:cNvSpPr>
-            <a:spLocks noGrp="1"/>
-          </p:cNvSpPr>
-          <p:nvPr>
-            <p:ph type="title"/>
-          </p:nvPr>
-        </p:nvSpPr>
-        <p:spPr/>
-        <p:txBody>
-          <a:bodyPr/>
-          <a:lstStyle/>
-          <a:p>
-            <a:r>
-              <a:rPr lang="da-DK" noProof="0" dirty="0" err="1"/>
-              <a:t>Outline</a:t>
-            </a:r>
-            <a:endParaRPr lang="da-DK" noProof="0" dirty="0"/>
-          </a:p>
-        </p:txBody>
-      </p:sp>
-      <p:sp>
-        <p:nvSpPr>
-          <p:cNvPr id="5" name="Content Placeholder 4"/>
-          <p:cNvSpPr>
-            <a:spLocks noGrp="1"/>
-          </p:cNvSpPr>
-          <p:nvPr>
-            <p:ph idx="1"/>
-          </p:nvPr>
-        </p:nvSpPr>
-        <p:spPr/>
-        <p:txBody>
-          <a:bodyPr/>
-          <a:lstStyle/>
-          <a:p>
-            <a:pPr marL="342900" indent="-342900">
-              <a:buFont typeface="Arial" panose="020B0604020202020204" pitchFamily="34" charset="0"/>
-              <a:buChar char="•"/>
-            </a:pPr>
-            <a:r>
-              <a:rPr lang="da-DK" dirty="0" err="1"/>
-              <a:t>Introduction</a:t>
-            </a:r>
-            <a:endParaRPr lang="da-DK" noProof="0" dirty="0"/>
-          </a:p>
-          <a:p>
-            <a:pPr marL="342900" indent="-342900">
-              <a:buFont typeface="Arial" panose="020B0604020202020204" pitchFamily="34" charset="0"/>
-              <a:buChar char="•"/>
-            </a:pPr>
-            <a:r>
-              <a:rPr lang="da-DK" noProof="0" dirty="0"/>
-              <a:t>Problem statement</a:t>
-            </a:r>
-          </a:p>
-          <a:p>
-            <a:pPr marL="342900" indent="-342900">
-              <a:buFont typeface="Arial" panose="020B0604020202020204" pitchFamily="34" charset="0"/>
-              <a:buChar char="•"/>
-            </a:pPr>
-            <a:r>
-              <a:rPr lang="da-DK" dirty="0"/>
-              <a:t>Diffusion models</a:t>
-            </a:r>
-          </a:p>
-          <a:p>
-            <a:pPr marL="342900" indent="-342900">
-              <a:buFont typeface="Arial" panose="020B0604020202020204" pitchFamily="34" charset="0"/>
-              <a:buChar char="•"/>
-            </a:pPr>
-            <a:r>
-              <a:rPr lang="da-DK" noProof="0" dirty="0" err="1"/>
-              <a:t>Implementation</a:t>
-            </a:r>
-            <a:endParaRPr lang="da-DK" noProof="0" dirty="0"/>
-          </a:p>
-          <a:p>
-            <a:pPr marL="342900" indent="-342900">
-              <a:buFont typeface="Arial" panose="020B0604020202020204" pitchFamily="34" charset="0"/>
-              <a:buChar char="•"/>
-            </a:pPr>
-            <a:r>
-              <a:rPr lang="da-DK" dirty="0"/>
-              <a:t>Main </a:t>
-            </a:r>
-            <a:r>
-              <a:rPr lang="da-DK" dirty="0" err="1"/>
-              <a:t>results</a:t>
-            </a:r>
-            <a:r>
-              <a:rPr lang="da-DK" dirty="0"/>
-              <a:t> &amp; </a:t>
-            </a:r>
-            <a:r>
-              <a:rPr lang="da-DK" dirty="0" err="1"/>
-              <a:t>discussion</a:t>
-            </a:r>
-            <a:endParaRPr lang="da-DK" dirty="0"/>
-          </a:p>
-          <a:p>
-            <a:pPr marL="342900" indent="-342900">
-              <a:buFont typeface="Arial" panose="020B0604020202020204" pitchFamily="34" charset="0"/>
-              <a:buChar char="•"/>
-            </a:pPr>
-            <a:r>
-              <a:rPr lang="da-DK" noProof="0" dirty="0" err="1"/>
-              <a:t>Concluding</a:t>
-            </a:r>
-            <a:r>
-              <a:rPr lang="da-DK" noProof="0" dirty="0"/>
-              <a:t> rem</a:t>
-            </a:r>
-            <a:r>
-              <a:rPr lang="da-DK" dirty="0"/>
-              <a:t>arks</a:t>
-            </a:r>
-            <a:endParaRPr lang="da-DK" noProof="0" dirty="0"/>
-          </a:p>
-          <a:p>
-            <a:pPr marL="342900" indent="-342900">
-              <a:buFont typeface="Arial" panose="020B0604020202020204" pitchFamily="34" charset="0"/>
-              <a:buChar char="•"/>
-            </a:pPr>
-            <a:endParaRPr lang="da-DK" noProof="0" dirty="0"/>
-          </a:p>
-        </p:txBody>
-      </p:sp>
-    </p:spTree>
-    <p:custDataLst>
-      <p:custData r:id="rId1"/>
-      <p:custData r:id="rId2"/>
-      <p:tags r:id="rId3"/>
-    </p:custDataLst>
-    <p:extLst>
-      <p:ext uri="{BB962C8B-B14F-4D97-AF65-F5344CB8AC3E}">
-        <p14:creationId xmlns:p14="http://schemas.microsoft.com/office/powerpoint/2010/main" val="2813365767"/>
-      </p:ext>
-    </p:extLst>
-  </p:cSld>
-  <p:clrMapOvr>
-    <a:masterClrMapping/>
-  </p:clrMapOvr>
-</p:sld>
-</file>
-
 <file path=ppt/slides/slide3.xml><?xml version="1.0" encoding="utf-8"?>
 <p:sld xmlns:a="http://schemas.openxmlformats.org/drawingml/2006/main" xmlns:r="http://schemas.openxmlformats.org/officeDocument/2006/relationships" xmlns:p="http://schemas.openxmlformats.org/presentationml/2006/main">
   <p:cSld>
@@ -10652,41 +11437,88 @@
           </a:p>
         </p:txBody>
       </p:sp>
-      <p:sp>
-        <p:nvSpPr>
-          <p:cNvPr id="5" name="Content Placeholder 4"/>
-          <p:cNvSpPr>
-            <a:spLocks noGrp="1"/>
-          </p:cNvSpPr>
-          <p:nvPr>
-            <p:ph idx="1"/>
-          </p:nvPr>
-        </p:nvSpPr>
-        <p:spPr/>
-        <p:txBody>
-          <a:bodyPr/>
-          <a:lstStyle/>
-          <a:p>
-            <a:pPr marL="342900" indent="-342900">
-              <a:buFont typeface="Arial" panose="020B0604020202020204" pitchFamily="34" charset="0"/>
-              <a:buChar char="•"/>
-            </a:pPr>
-            <a:r>
-              <a:rPr lang="da-DK" b="1" noProof="0" dirty="0" err="1"/>
-              <a:t>Climate</a:t>
-            </a:r>
-            <a:r>
-              <a:rPr lang="da-DK" b="1" noProof="0" dirty="0"/>
-              <a:t> </a:t>
-            </a:r>
-            <a:r>
-              <a:rPr lang="da-DK" b="1" noProof="0" dirty="0" err="1"/>
-              <a:t>change</a:t>
-            </a:r>
-            <a:endParaRPr lang="da-DK" b="1" noProof="0" dirty="0"/>
-          </a:p>
-        </p:txBody>
-      </p:sp>
+      <mc:AlternateContent xmlns:mc="http://schemas.openxmlformats.org/markup-compatibility/2006">
+        <mc:Choice xmlns:a14="http://schemas.microsoft.com/office/drawing/2010/main" Requires="a14">
+          <p:sp>
+            <p:nvSpPr>
+              <p:cNvPr id="5" name="Content Placeholder 4"/>
+              <p:cNvSpPr>
+                <a:spLocks noGrp="1"/>
+              </p:cNvSpPr>
+              <p:nvPr>
+                <p:ph idx="1"/>
+              </p:nvPr>
+            </p:nvSpPr>
+            <p:spPr/>
+            <p:txBody>
+              <a:bodyPr/>
+              <a:lstStyle/>
+              <a:p>
+                <a:pPr marL="342900" indent="-342900">
+                  <a:buFont typeface="Arial" panose="020B0604020202020204" pitchFamily="34" charset="0"/>
+                  <a:buChar char="•"/>
+                </a:pPr>
+                <a:r>
+                  <a:rPr lang="da-DK" noProof="0" dirty="0"/>
+                  <a:t>Climate </a:t>
+                </a:r>
+                <a:r>
+                  <a:rPr lang="da-DK" noProof="0" dirty="0" err="1"/>
+                  <a:t>change</a:t>
+                </a:r>
+                <a:r>
+                  <a:rPr lang="da-DK" noProof="0" dirty="0"/>
+                  <a:t> </a:t>
+                </a:r>
+                <a14:m>
+                  <m:oMath xmlns:m="http://schemas.openxmlformats.org/officeDocument/2006/math">
+                    <m:r>
+                      <a:rPr lang="da-DK" b="0" i="1" noProof="0" smtClean="0">
+                        <a:latin typeface="Cambria Math" panose="02040503050406030204" pitchFamily="18" charset="0"/>
+                      </a:rPr>
+                      <m:t>→</m:t>
+                    </m:r>
+                  </m:oMath>
+                </a14:m>
+                <a:endParaRPr lang="da-DK" i="1" noProof="0" dirty="0"/>
+              </a:p>
+            </p:txBody>
+          </p:sp>
+        </mc:Choice>
+        <mc:Fallback>
+          <p:sp>
+            <p:nvSpPr>
+              <p:cNvPr id="5" name="Content Placeholder 4"/>
+              <p:cNvSpPr>
+                <a:spLocks noGrp="1" noRot="1" noChangeAspect="1" noMove="1" noResize="1" noEditPoints="1" noAdjustHandles="1" noChangeArrowheads="1" noChangeShapeType="1" noTextEdit="1"/>
+              </p:cNvSpPr>
+              <p:nvPr>
+                <p:ph idx="1"/>
+              </p:nvPr>
+            </p:nvSpPr>
+            <p:spPr>
+              <a:blipFill>
+                <a:blip r:embed="rId6"/>
+                <a:stretch>
+                  <a:fillRect l="-1432" t="-1752"/>
+                </a:stretch>
+              </a:blipFill>
+            </p:spPr>
+            <p:txBody>
+              <a:bodyPr/>
+              <a:lstStyle/>
+              <a:p>
+                <a:r>
+                  <a:rPr lang="da-DK">
+                    <a:noFill/>
+                  </a:rPr>
+                  <a:t> </a:t>
+                </a:r>
+              </a:p>
+            </p:txBody>
+          </p:sp>
+        </mc:Fallback>
+      </mc:AlternateContent>
     </p:spTree>
     <p:custDataLst>
       <p:custData r:id="rId1"/>
@@ -10727,7 +11559,7 @@
           <p:cNvPr id="2" name="Titel 1">
             <a:extLst>
               <a:ext uri="{FF2B5EF4-FFF2-40B4-BE49-F238E27FC236}">
-                <a16:creationId xmlns:a16="http://schemas.microsoft.com/office/drawing/2014/main" id="{89C49794-A64E-4298-C055-AD56FCB0FE72}"/>
+                <a16:creationId xmlns:a16="http://schemas.microsoft.com/office/drawing/2014/main" id="{86C8C380-42EB-D08A-EC61-EAFBB095550B}"/>
               </a:ext>
             </a:extLst>
           </p:cNvPr>
@@ -10744,9 +11576,10 @@
           <a:lstStyle/>
           <a:p>
             <a:r>
-              <a:rPr lang="da-DK" dirty="0"/>
-              <a:t>Problem statement</a:t>
-            </a:r>
+              <a:rPr lang="da-DK" dirty="0" err="1"/>
+              <a:t>Introduction</a:t>
+            </a:r>
+            <a:endParaRPr lang="da-DK" dirty="0"/>
           </a:p>
         </p:txBody>
       </p:sp>
@@ -10755,7 +11588,7 @@
           <p:cNvPr id="3" name="Pladsholder til indhold 2">
             <a:extLst>
               <a:ext uri="{FF2B5EF4-FFF2-40B4-BE49-F238E27FC236}">
-                <a16:creationId xmlns:a16="http://schemas.microsoft.com/office/drawing/2014/main" id="{9B1E940A-E534-F769-89D9-58F62F30E57E}"/>
+                <a16:creationId xmlns:a16="http://schemas.microsoft.com/office/drawing/2014/main" id="{3DB72B79-92BB-3CEC-5CA1-80778EDF8CE7}"/>
               </a:ext>
             </a:extLst>
           </p:cNvPr>
@@ -10771,32 +11604,19 @@
           <a:bodyPr/>
           <a:lstStyle/>
           <a:p>
-            <a:pPr>
-              <a:lnSpc>
-                <a:spcPct val="150000"/>
-              </a:lnSpc>
+            <a:pPr marL="342900" indent="-342900">
+              <a:buFont typeface="Arial" panose="020B0604020202020204" pitchFamily="34" charset="0"/>
+              <a:buChar char="•"/>
             </a:pPr>
             <a:r>
-              <a:rPr lang="en-US" i="1" dirty="0"/>
-              <a:t>“We will extend on the previous work \cite{</a:t>
-            </a:r>
-            <a:r>
-              <a:rPr lang="en-US" i="1" dirty="0" err="1"/>
-              <a:t>cheula_saas</a:t>
-            </a:r>
-            <a:r>
-              <a:rPr lang="en-US" i="1" dirty="0"/>
-              <a:t>} on  Single Atomic Alloys (SAAs). We will try to answer how a diffusion model can be integrated into a traditional search algorithm to find good catalysts. We will restrict the problem to only considering the atomic species of the 100 and 111 </a:t>
-            </a:r>
-            <a:r>
-              <a:rPr lang="en-US" i="1" dirty="0" err="1"/>
-              <a:t>fcc</a:t>
-            </a:r>
-            <a:r>
-              <a:rPr lang="en-US" i="1" dirty="0"/>
-              <a:t> surfaces. To do this, we must implement a diffusion model and understand its inner workings. We will also try to answer how they can be used when multiple properties are desired. In our case, stability and reaction rate.”</a:t>
-            </a:r>
-            <a:endParaRPr lang="da-DK" i="1" dirty="0"/>
+              <a:rPr lang="da-DK" dirty="0"/>
+              <a:t>Inverse design </a:t>
+            </a:r>
+            <a:r>
+              <a:rPr lang="da-DK" dirty="0" err="1"/>
+              <a:t>process</a:t>
+            </a:r>
+            <a:endParaRPr lang="da-DK" dirty="0"/>
           </a:p>
         </p:txBody>
       </p:sp>
@@ -10805,7 +11625,7 @@
           <p:cNvPr id="4" name="Pladsholder til dato 3">
             <a:extLst>
               <a:ext uri="{FF2B5EF4-FFF2-40B4-BE49-F238E27FC236}">
-                <a16:creationId xmlns:a16="http://schemas.microsoft.com/office/drawing/2014/main" id="{E6D3285D-8D31-9A2D-3F73-ED5CE0414041}"/>
+                <a16:creationId xmlns:a16="http://schemas.microsoft.com/office/drawing/2014/main" id="{C7A027F6-8D31-199E-36D9-DA3F0A901A64}"/>
               </a:ext>
             </a:extLst>
           </p:cNvPr>
@@ -10821,18 +11641,54 @@
           <a:bodyPr/>
           <a:lstStyle/>
           <a:p>
-            <a:fld id="{A0D9607F-6FE8-46A1-A399-B2AF355F9D72}" type="datetime1">
+            <a:fld id="{A0A8B493-15EA-4E70-91D6-3CA8A6D7CFC1}" type="datetime1">
               <a:rPr lang="da-DK" smtClean="0"/>
-              <a:t>03-06-2026</a:t>
+              <a:t>06-06-2026</a:t>
             </a:fld>
             <a:endParaRPr lang="da-DK" dirty="0"/>
           </a:p>
         </p:txBody>
       </p:sp>
+      <p:pic>
+        <p:nvPicPr>
+          <p:cNvPr id="22" name="Billede 21" descr="Et billede, der indeholder tekst, cirkel, Font/skrifttype, skærmbillede&#10;&#10;AI-genereret indhold kan være ukorrekt.">
+            <a:extLst>
+              <a:ext uri="{FF2B5EF4-FFF2-40B4-BE49-F238E27FC236}">
+                <a16:creationId xmlns:a16="http://schemas.microsoft.com/office/drawing/2014/main" id="{D9C31F03-EE55-EE33-E464-4F5737DB4D7E}"/>
+              </a:ext>
+            </a:extLst>
+          </p:cNvPr>
+          <p:cNvPicPr>
+            <a:picLocks noChangeAspect="1"/>
+          </p:cNvPicPr>
+          <p:nvPr/>
+        </p:nvPicPr>
+        <p:blipFill>
+          <a:blip r:embed="rId2">
+            <a:extLst>
+              <a:ext uri="{28A0092B-C50C-407E-A947-70E740481C1C}">
+                <a14:useLocalDpi xmlns:a14="http://schemas.microsoft.com/office/drawing/2010/main" val="0"/>
+              </a:ext>
+            </a:extLst>
+          </a:blip>
+          <a:stretch>
+            <a:fillRect/>
+          </a:stretch>
+        </p:blipFill>
+        <p:spPr>
+          <a:xfrm>
+            <a:off x="2754320" y="1916832"/>
+            <a:ext cx="6680184" cy="3684149"/>
+          </a:xfrm>
+          <a:prstGeom prst="rect">
+            <a:avLst/>
+          </a:prstGeom>
+        </p:spPr>
+      </p:pic>
     </p:spTree>
     <p:extLst>
       <p:ext uri="{BB962C8B-B14F-4D97-AF65-F5344CB8AC3E}">
-        <p14:creationId xmlns:p14="http://schemas.microsoft.com/office/powerpoint/2010/main" val="1140170818"/>
+        <p14:creationId xmlns:p14="http://schemas.microsoft.com/office/powerpoint/2010/main" val="2985836782"/>
       </p:ext>
     </p:extLst>
   </p:cSld>
@@ -10864,7 +11720,7 @@
           <p:cNvPr id="2" name="Titel 1">
             <a:extLst>
               <a:ext uri="{FF2B5EF4-FFF2-40B4-BE49-F238E27FC236}">
-                <a16:creationId xmlns:a16="http://schemas.microsoft.com/office/drawing/2014/main" id="{BF9B3C35-F554-1BE5-0E63-C440F506EE41}"/>
+                <a16:creationId xmlns:a16="http://schemas.microsoft.com/office/drawing/2014/main" id="{5C1EBB65-431E-5DC9-F713-4942254D0D05}"/>
               </a:ext>
             </a:extLst>
           </p:cNvPr>
@@ -10881,9 +11737,10 @@
           <a:lstStyle/>
           <a:p>
             <a:r>
-              <a:rPr lang="da-DK" dirty="0"/>
-              <a:t>Diffusion models</a:t>
-            </a:r>
+              <a:rPr lang="da-DK" dirty="0" err="1"/>
+              <a:t>Introduction</a:t>
+            </a:r>
+            <a:endParaRPr lang="da-DK" dirty="0"/>
           </a:p>
         </p:txBody>
       </p:sp>
@@ -10892,7 +11749,7 @@
           <p:cNvPr id="3" name="Pladsholder til indhold 2">
             <a:extLst>
               <a:ext uri="{FF2B5EF4-FFF2-40B4-BE49-F238E27FC236}">
-                <a16:creationId xmlns:a16="http://schemas.microsoft.com/office/drawing/2014/main" id="{9776158E-1EA2-9F24-322A-49C2E0E529C4}"/>
+                <a16:creationId xmlns:a16="http://schemas.microsoft.com/office/drawing/2014/main" id="{50A94B8D-1F0C-FBC9-9738-6CD389E266D3}"/>
               </a:ext>
             </a:extLst>
           </p:cNvPr>
@@ -10917,7 +11774,7 @@
           <p:cNvPr id="4" name="Pladsholder til dato 3">
             <a:extLst>
               <a:ext uri="{FF2B5EF4-FFF2-40B4-BE49-F238E27FC236}">
-                <a16:creationId xmlns:a16="http://schemas.microsoft.com/office/drawing/2014/main" id="{0B547133-81F5-C9E8-3878-3955A2601723}"/>
+                <a16:creationId xmlns:a16="http://schemas.microsoft.com/office/drawing/2014/main" id="{7790CDEB-5940-03B8-88A9-E111A5EB4AA7}"/>
               </a:ext>
             </a:extLst>
           </p:cNvPr>
@@ -10933,9 +11790,9 @@
           <a:bodyPr/>
           <a:lstStyle/>
           <a:p>
-            <a:fld id="{87B16CDE-95A7-4B76-AC24-5DD1281AC3B4}" type="datetime1">
+            <a:fld id="{580A9012-99F9-450D-B679-F272DDE9E7FC}" type="datetime1">
               <a:rPr lang="da-DK" smtClean="0"/>
-              <a:t>03-06-2026</a:t>
+              <a:t>06-06-2026</a:t>
             </a:fld>
             <a:endParaRPr lang="da-DK" dirty="0"/>
           </a:p>
@@ -10944,7 +11801,7 @@
     </p:spTree>
     <p:extLst>
       <p:ext uri="{BB962C8B-B14F-4D97-AF65-F5344CB8AC3E}">
-        <p14:creationId xmlns:p14="http://schemas.microsoft.com/office/powerpoint/2010/main" val="301104243"/>
+        <p14:creationId xmlns:p14="http://schemas.microsoft.com/office/powerpoint/2010/main" val="2367041688"/>
       </p:ext>
     </p:extLst>
   </p:cSld>
@@ -10976,7 +11833,7 @@
           <p:cNvPr id="2" name="Titel 1">
             <a:extLst>
               <a:ext uri="{FF2B5EF4-FFF2-40B4-BE49-F238E27FC236}">
-                <a16:creationId xmlns:a16="http://schemas.microsoft.com/office/drawing/2014/main" id="{195C8842-1949-4DFC-AB19-D157177870D7}"/>
+                <a16:creationId xmlns:a16="http://schemas.microsoft.com/office/drawing/2014/main" id="{89C49794-A64E-4298-C055-AD56FCB0FE72}"/>
               </a:ext>
             </a:extLst>
           </p:cNvPr>
@@ -10993,10 +11850,9 @@
           <a:lstStyle/>
           <a:p>
             <a:r>
-              <a:rPr lang="da-DK" dirty="0" err="1"/>
-              <a:t>Implementation</a:t>
-            </a:r>
-            <a:endParaRPr lang="da-DK" dirty="0"/>
+              <a:rPr lang="da-DK" dirty="0"/>
+              <a:t>Problem statement</a:t>
+            </a:r>
           </a:p>
         </p:txBody>
       </p:sp>
@@ -11005,7 +11861,7 @@
           <p:cNvPr id="3" name="Pladsholder til indhold 2">
             <a:extLst>
               <a:ext uri="{FF2B5EF4-FFF2-40B4-BE49-F238E27FC236}">
-                <a16:creationId xmlns:a16="http://schemas.microsoft.com/office/drawing/2014/main" id="{964C60AF-409F-C091-E034-34F030FF3E99}"/>
+                <a16:creationId xmlns:a16="http://schemas.microsoft.com/office/drawing/2014/main" id="{9B1E940A-E534-F769-89D9-58F62F30E57E}"/>
               </a:ext>
             </a:extLst>
           </p:cNvPr>
@@ -11021,7 +11877,32 @@
           <a:bodyPr/>
           <a:lstStyle/>
           <a:p>
-            <a:endParaRPr lang="da-DK"/>
+            <a:pPr>
+              <a:lnSpc>
+                <a:spcPct val="150000"/>
+              </a:lnSpc>
+            </a:pPr>
+            <a:r>
+              <a:rPr lang="en-US" i="1" dirty="0"/>
+              <a:t>“We will extend on the previous work \cite{</a:t>
+            </a:r>
+            <a:r>
+              <a:rPr lang="en-US" i="1" dirty="0" err="1"/>
+              <a:t>cheula_saas</a:t>
+            </a:r>
+            <a:r>
+              <a:rPr lang="en-US" i="1" dirty="0"/>
+              <a:t>} on  Single Atomic Alloys (SAAs). We will try to answer how a diffusion model can be integrated into a traditional search algorithm to find good catalysts. We will restrict the problem to only considering the atomic species of the 100 and 111 </a:t>
+            </a:r>
+            <a:r>
+              <a:rPr lang="en-US" i="1" dirty="0" err="1"/>
+              <a:t>fcc</a:t>
+            </a:r>
+            <a:r>
+              <a:rPr lang="en-US" i="1" dirty="0"/>
+              <a:t> surfaces. To do this, we must implement a diffusion model and understand its inner workings. We will also try to answer how they can be used when multiple properties are desired. In our case, stability and reaction rate.”</a:t>
+            </a:r>
+            <a:endParaRPr lang="da-DK" i="1" dirty="0"/>
           </a:p>
         </p:txBody>
       </p:sp>
@@ -11030,7 +11911,7 @@
           <p:cNvPr id="4" name="Pladsholder til dato 3">
             <a:extLst>
               <a:ext uri="{FF2B5EF4-FFF2-40B4-BE49-F238E27FC236}">
-                <a16:creationId xmlns:a16="http://schemas.microsoft.com/office/drawing/2014/main" id="{DB372499-358A-34C7-26AC-05C527148683}"/>
+                <a16:creationId xmlns:a16="http://schemas.microsoft.com/office/drawing/2014/main" id="{E6D3285D-8D31-9A2D-3F73-ED5CE0414041}"/>
               </a:ext>
             </a:extLst>
           </p:cNvPr>
@@ -11046,9 +11927,9 @@
           <a:bodyPr/>
           <a:lstStyle/>
           <a:p>
-            <a:fld id="{CF7C4603-1403-47A3-A603-AFF51D07CC91}" type="datetime1">
+            <a:fld id="{A0D9607F-6FE8-46A1-A399-B2AF355F9D72}" type="datetime1">
               <a:rPr lang="da-DK" smtClean="0"/>
-              <a:t>03-06-2026</a:t>
+              <a:t>06-06-2026</a:t>
             </a:fld>
             <a:endParaRPr lang="da-DK" dirty="0"/>
           </a:p>
@@ -11057,7 +11938,7 @@
     </p:spTree>
     <p:extLst>
       <p:ext uri="{BB962C8B-B14F-4D97-AF65-F5344CB8AC3E}">
-        <p14:creationId xmlns:p14="http://schemas.microsoft.com/office/powerpoint/2010/main" val="3355098787"/>
+        <p14:creationId xmlns:p14="http://schemas.microsoft.com/office/powerpoint/2010/main" val="1140170818"/>
       </p:ext>
     </p:extLst>
   </p:cSld>
@@ -11072,7 +11953,13 @@
   <p:cSld>
     <p:spTree>
       <p:nvGrpSpPr>
-        <p:cNvPr id="1" name=""/>
+        <p:cNvPr id="1" name="">
+          <a:extLst>
+            <a:ext uri="{FF2B5EF4-FFF2-40B4-BE49-F238E27FC236}">
+              <a16:creationId xmlns:a16="http://schemas.microsoft.com/office/drawing/2014/main" id="{BC58A172-3CB0-DA04-9E4B-9A5176E17DE5}"/>
+            </a:ext>
+          </a:extLst>
+        </p:cNvPr>
         <p:cNvGrpSpPr/>
         <p:nvPr/>
       </p:nvGrpSpPr>
@@ -11089,7 +11976,7 @@
           <p:cNvPr id="2" name="Titel 1">
             <a:extLst>
               <a:ext uri="{FF2B5EF4-FFF2-40B4-BE49-F238E27FC236}">
-                <a16:creationId xmlns:a16="http://schemas.microsoft.com/office/drawing/2014/main" id="{EA2C088B-3709-65DC-4E9C-28A4D35EE040}"/>
+                <a16:creationId xmlns:a16="http://schemas.microsoft.com/office/drawing/2014/main" id="{F11489E9-57BA-08BC-5FCE-20692998FD84}"/>
               </a:ext>
             </a:extLst>
           </p:cNvPr>
@@ -11107,37 +11994,96 @@
           <a:p>
             <a:r>
               <a:rPr lang="da-DK" dirty="0"/>
-              <a:t>Main </a:t>
+              <a:t>Diffusion models</a:t>
+            </a:r>
+          </a:p>
+        </p:txBody>
+      </p:sp>
+      <p:sp>
+        <p:nvSpPr>
+          <p:cNvPr id="3" name="Pladsholder til indhold 2">
+            <a:extLst>
+              <a:ext uri="{FF2B5EF4-FFF2-40B4-BE49-F238E27FC236}">
+                <a16:creationId xmlns:a16="http://schemas.microsoft.com/office/drawing/2014/main" id="{0BE304C2-8C0D-ED3C-2533-2C0B2DA7FD53}"/>
+              </a:ext>
+            </a:extLst>
+          </p:cNvPr>
+          <p:cNvSpPr>
+            <a:spLocks noGrp="1"/>
+          </p:cNvSpPr>
+          <p:nvPr>
+            <p:ph idx="1"/>
+          </p:nvPr>
+        </p:nvSpPr>
+        <p:spPr/>
+        <p:txBody>
+          <a:bodyPr/>
+          <a:lstStyle/>
+          <a:p>
+            <a:pPr marL="342900" indent="-342900">
+              <a:buFont typeface="Arial" panose="020B0604020202020204" pitchFamily="34" charset="0"/>
+              <a:buChar char="•"/>
+            </a:pPr>
+            <a:r>
+              <a:rPr lang="da-DK" dirty="0"/>
+              <a:t>General generative </a:t>
             </a:r>
             <a:r>
               <a:rPr lang="da-DK" dirty="0" err="1"/>
-              <a:t>results</a:t>
-            </a:r>
+              <a:t>process</a:t>
+            </a:r>
+            <a:endParaRPr lang="da-DK" dirty="0"/>
+          </a:p>
+        </p:txBody>
+      </p:sp>
+      <p:sp>
+        <p:nvSpPr>
+          <p:cNvPr id="4" name="Pladsholder til dato 3">
+            <a:extLst>
+              <a:ext uri="{FF2B5EF4-FFF2-40B4-BE49-F238E27FC236}">
+                <a16:creationId xmlns:a16="http://schemas.microsoft.com/office/drawing/2014/main" id="{A23DBDEA-6EAC-6119-9534-557E826D059D}"/>
+              </a:ext>
+            </a:extLst>
+          </p:cNvPr>
+          <p:cNvSpPr>
+            <a:spLocks noGrp="1"/>
+          </p:cNvSpPr>
+          <p:nvPr>
+            <p:ph type="dt" sz="half" idx="10"/>
+          </p:nvPr>
+        </p:nvSpPr>
+        <p:spPr/>
+        <p:txBody>
+          <a:bodyPr/>
+          <a:lstStyle/>
+          <a:p>
+            <a:fld id="{580A9012-99F9-450D-B679-F272DDE9E7FC}" type="datetime1">
+              <a:rPr lang="da-DK" smtClean="0"/>
+              <a:t>06-06-2026</a:t>
+            </a:fld>
             <a:endParaRPr lang="da-DK" dirty="0"/>
           </a:p>
         </p:txBody>
       </p:sp>
       <p:pic>
         <p:nvPicPr>
-          <p:cNvPr id="6" name="Pladsholder til indhold 5">
+          <p:cNvPr id="5" name="Billede 4" descr="Et billede, der indeholder diagram, kvadratisk, tekst, linje/række&#10;&#10;AI-genereret indhold kan være ukorrekt.">
             <a:extLst>
               <a:ext uri="{FF2B5EF4-FFF2-40B4-BE49-F238E27FC236}">
-                <a16:creationId xmlns:a16="http://schemas.microsoft.com/office/drawing/2014/main" id="{374176C8-421A-FD43-BC1E-69BE45C36601}"/>
+                <a16:creationId xmlns:a16="http://schemas.microsoft.com/office/drawing/2014/main" id="{0ADCFF3C-C1E9-9726-B644-4C7A9120FDCB}"/>
               </a:ext>
             </a:extLst>
           </p:cNvPr>
           <p:cNvPicPr>
-            <a:picLocks noGrp="1" noChangeAspect="1"/>
+            <a:picLocks noChangeAspect="1"/>
           </p:cNvPicPr>
-          <p:nvPr>
-            <p:ph idx="1"/>
-          </p:nvPr>
+          <p:nvPr/>
         </p:nvPicPr>
         <p:blipFill>
           <a:blip r:embed="rId2">
             <a:extLst>
-              <a:ext uri="{96DAC541-7B7A-43D3-8B79-37D633B846F1}">
-                <asvg:svgBlip xmlns:asvg="http://schemas.microsoft.com/office/drawing/2016/SVG/main" r:embed="rId3"/>
+              <a:ext uri="{28A0092B-C50C-407E-A947-70E740481C1C}">
+                <a14:useLocalDpi xmlns:a14="http://schemas.microsoft.com/office/drawing/2010/main" val="0"/>
               </a:ext>
             </a:extLst>
           </a:blip>
@@ -11147,44 +12093,18 @@
         </p:blipFill>
         <p:spPr>
           <a:xfrm>
-            <a:off x="1581812" y="1783259"/>
-            <a:ext cx="9025200" cy="4140000"/>
-          </a:xfrm>
+            <a:off x="6093913" y="1192323"/>
+            <a:ext cx="5532222" cy="4702064"/>
+          </a:xfrm>
+          <a:prstGeom prst="rect">
+            <a:avLst/>
+          </a:prstGeom>
         </p:spPr>
       </p:pic>
-      <p:sp>
-        <p:nvSpPr>
-          <p:cNvPr id="4" name="Pladsholder til dato 3">
-            <a:extLst>
-              <a:ext uri="{FF2B5EF4-FFF2-40B4-BE49-F238E27FC236}">
-                <a16:creationId xmlns:a16="http://schemas.microsoft.com/office/drawing/2014/main" id="{B1A29E85-380C-377D-79FA-DCF134530B7C}"/>
-              </a:ext>
-            </a:extLst>
-          </p:cNvPr>
-          <p:cNvSpPr>
-            <a:spLocks noGrp="1"/>
-          </p:cNvSpPr>
-          <p:nvPr>
-            <p:ph type="dt" sz="half" idx="10"/>
-          </p:nvPr>
-        </p:nvSpPr>
-        <p:spPr/>
-        <p:txBody>
-          <a:bodyPr/>
-          <a:lstStyle/>
-          <a:p>
-            <a:fld id="{BA25F783-37A3-4FDF-B0A4-3DCF78A1F576}" type="datetime1">
-              <a:rPr lang="da-DK" smtClean="0"/>
-              <a:t>03-06-2026</a:t>
-            </a:fld>
-            <a:endParaRPr lang="da-DK" dirty="0"/>
-          </a:p>
-        </p:txBody>
-      </p:sp>
     </p:spTree>
     <p:extLst>
       <p:ext uri="{BB962C8B-B14F-4D97-AF65-F5344CB8AC3E}">
-        <p14:creationId xmlns:p14="http://schemas.microsoft.com/office/powerpoint/2010/main" val="32999733"/>
+        <p14:creationId xmlns:p14="http://schemas.microsoft.com/office/powerpoint/2010/main" val="289818429"/>
       </p:ext>
     </p:extLst>
   </p:cSld>
@@ -11199,7 +12119,13 @@
   <p:cSld>
     <p:spTree>
       <p:nvGrpSpPr>
-        <p:cNvPr id="1" name=""/>
+        <p:cNvPr id="1" name="">
+          <a:extLst>
+            <a:ext uri="{FF2B5EF4-FFF2-40B4-BE49-F238E27FC236}">
+              <a16:creationId xmlns:a16="http://schemas.microsoft.com/office/drawing/2014/main" id="{5950955F-FA05-D403-2B0B-7A2AF215EA5A}"/>
+            </a:ext>
+          </a:extLst>
+        </p:cNvPr>
         <p:cNvGrpSpPr/>
         <p:nvPr/>
       </p:nvGrpSpPr>
@@ -11216,7 +12142,7 @@
           <p:cNvPr id="2" name="Titel 1">
             <a:extLst>
               <a:ext uri="{FF2B5EF4-FFF2-40B4-BE49-F238E27FC236}">
-                <a16:creationId xmlns:a16="http://schemas.microsoft.com/office/drawing/2014/main" id="{C2DEF6AD-A162-8844-6DAC-171BA68FDA2A}"/>
+                <a16:creationId xmlns:a16="http://schemas.microsoft.com/office/drawing/2014/main" id="{5DDFDEE5-B7FB-4CBC-B9DC-52BAB7D1CC4D}"/>
               </a:ext>
             </a:extLst>
           </p:cNvPr>
@@ -11234,37 +12160,103 @@
           <a:p>
             <a:r>
               <a:rPr lang="da-DK" dirty="0"/>
-              <a:t>Main </a:t>
-            </a:r>
+              <a:t>Diffusion models</a:t>
+            </a:r>
+          </a:p>
+        </p:txBody>
+      </p:sp>
+      <p:sp>
+        <p:nvSpPr>
+          <p:cNvPr id="3" name="Pladsholder til indhold 2">
+            <a:extLst>
+              <a:ext uri="{FF2B5EF4-FFF2-40B4-BE49-F238E27FC236}">
+                <a16:creationId xmlns:a16="http://schemas.microsoft.com/office/drawing/2014/main" id="{93803ADA-AE09-FEA9-0389-1CE63D1978F1}"/>
+              </a:ext>
+            </a:extLst>
+          </p:cNvPr>
+          <p:cNvSpPr>
+            <a:spLocks noGrp="1"/>
+          </p:cNvSpPr>
+          <p:nvPr>
+            <p:ph idx="1"/>
+          </p:nvPr>
+        </p:nvSpPr>
+        <p:spPr/>
+        <p:txBody>
+          <a:bodyPr/>
+          <a:lstStyle/>
+          <a:p>
+            <a:pPr marL="342900" indent="-342900">
+              <a:buFont typeface="Arial" panose="020B0604020202020204" pitchFamily="34" charset="0"/>
+              <a:buChar char="•"/>
+            </a:pPr>
             <a:r>
               <a:rPr lang="da-DK" dirty="0" err="1"/>
-              <a:t>results</a:t>
-            </a:r>
+              <a:t>What</a:t>
+            </a:r>
+            <a:r>
+              <a:rPr lang="da-DK" dirty="0"/>
+              <a:t> </a:t>
+            </a:r>
+            <a:r>
+              <a:rPr lang="da-DK" dirty="0" err="1"/>
+              <a:t>happens</a:t>
+            </a:r>
+            <a:r>
+              <a:rPr lang="da-DK" dirty="0"/>
+              <a:t> under the hood</a:t>
+            </a:r>
+          </a:p>
+        </p:txBody>
+      </p:sp>
+      <p:sp>
+        <p:nvSpPr>
+          <p:cNvPr id="4" name="Pladsholder til dato 3">
+            <a:extLst>
+              <a:ext uri="{FF2B5EF4-FFF2-40B4-BE49-F238E27FC236}">
+                <a16:creationId xmlns:a16="http://schemas.microsoft.com/office/drawing/2014/main" id="{DA0CC603-04BC-098D-2E96-F85D718988B5}"/>
+              </a:ext>
+            </a:extLst>
+          </p:cNvPr>
+          <p:cNvSpPr>
+            <a:spLocks noGrp="1"/>
+          </p:cNvSpPr>
+          <p:nvPr>
+            <p:ph type="dt" sz="half" idx="10"/>
+          </p:nvPr>
+        </p:nvSpPr>
+        <p:spPr/>
+        <p:txBody>
+          <a:bodyPr/>
+          <a:lstStyle/>
+          <a:p>
+            <a:fld id="{580A9012-99F9-450D-B679-F272DDE9E7FC}" type="datetime1">
+              <a:rPr lang="da-DK" smtClean="0"/>
+              <a:t>06-06-2026</a:t>
+            </a:fld>
             <a:endParaRPr lang="da-DK" dirty="0"/>
           </a:p>
         </p:txBody>
       </p:sp>
       <p:pic>
         <p:nvPicPr>
-          <p:cNvPr id="6" name="Pladsholder til indhold 5">
+          <p:cNvPr id="5" name="Billede 4" descr="Et billede, der indeholder diagram, kvadratisk, tekst, linje/række&#10;&#10;AI-genereret indhold kan være ukorrekt.">
             <a:extLst>
               <a:ext uri="{FF2B5EF4-FFF2-40B4-BE49-F238E27FC236}">
-                <a16:creationId xmlns:a16="http://schemas.microsoft.com/office/drawing/2014/main" id="{B9C05493-EEB6-22D3-EC8D-8533DDC947FC}"/>
+                <a16:creationId xmlns:a16="http://schemas.microsoft.com/office/drawing/2014/main" id="{C4CDAFA4-77C6-CB62-8E8F-64CD125A4FF0}"/>
               </a:ext>
             </a:extLst>
           </p:cNvPr>
           <p:cNvPicPr>
-            <a:picLocks noGrp="1" noChangeAspect="1"/>
+            <a:picLocks noChangeAspect="1"/>
           </p:cNvPicPr>
-          <p:nvPr>
-            <p:ph idx="1"/>
-          </p:nvPr>
+          <p:nvPr/>
         </p:nvPicPr>
         <p:blipFill>
           <a:blip r:embed="rId2">
             <a:extLst>
-              <a:ext uri="{96DAC541-7B7A-43D3-8B79-37D633B846F1}">
-                <asvg:svgBlip xmlns:asvg="http://schemas.microsoft.com/office/drawing/2016/SVG/main" r:embed="rId3"/>
+              <a:ext uri="{28A0092B-C50C-407E-A947-70E740481C1C}">
+                <a14:useLocalDpi xmlns:a14="http://schemas.microsoft.com/office/drawing/2010/main" val="0"/>
               </a:ext>
             </a:extLst>
           </a:blip>
@@ -11274,44 +12266,18 @@
         </p:blipFill>
         <p:spPr>
           <a:xfrm>
-            <a:off x="1581812" y="1754194"/>
-            <a:ext cx="9025200" cy="4140000"/>
-          </a:xfrm>
+            <a:off x="6093913" y="1192323"/>
+            <a:ext cx="5532222" cy="4702064"/>
+          </a:xfrm>
+          <a:prstGeom prst="rect">
+            <a:avLst/>
+          </a:prstGeom>
         </p:spPr>
       </p:pic>
-      <p:sp>
-        <p:nvSpPr>
-          <p:cNvPr id="4" name="Pladsholder til dato 3">
-            <a:extLst>
-              <a:ext uri="{FF2B5EF4-FFF2-40B4-BE49-F238E27FC236}">
-                <a16:creationId xmlns:a16="http://schemas.microsoft.com/office/drawing/2014/main" id="{BFF45F53-A411-6297-F6D7-E20B6B2440DF}"/>
-              </a:ext>
-            </a:extLst>
-          </p:cNvPr>
-          <p:cNvSpPr>
-            <a:spLocks noGrp="1"/>
-          </p:cNvSpPr>
-          <p:nvPr>
-            <p:ph type="dt" sz="half" idx="10"/>
-          </p:nvPr>
-        </p:nvSpPr>
-        <p:spPr/>
-        <p:txBody>
-          <a:bodyPr/>
-          <a:lstStyle/>
-          <a:p>
-            <a:fld id="{E7633D50-7C47-40EB-8713-EF433D7A7006}" type="datetime1">
-              <a:rPr lang="da-DK" smtClean="0"/>
-              <a:t>03-06-2026</a:t>
-            </a:fld>
-            <a:endParaRPr lang="da-DK" dirty="0"/>
-          </a:p>
-        </p:txBody>
-      </p:sp>
     </p:spTree>
     <p:extLst>
       <p:ext uri="{BB962C8B-B14F-4D97-AF65-F5344CB8AC3E}">
-        <p14:creationId xmlns:p14="http://schemas.microsoft.com/office/powerpoint/2010/main" val="1408005184"/>
+        <p14:creationId xmlns:p14="http://schemas.microsoft.com/office/powerpoint/2010/main" val="1186447151"/>
       </p:ext>
     </p:extLst>
   </p:cSld>
@@ -11326,7 +12292,13 @@
   <p:cSld>
     <p:spTree>
       <p:nvGrpSpPr>
-        <p:cNvPr id="1" name=""/>
+        <p:cNvPr id="1" name="">
+          <a:extLst>
+            <a:ext uri="{FF2B5EF4-FFF2-40B4-BE49-F238E27FC236}">
+              <a16:creationId xmlns:a16="http://schemas.microsoft.com/office/drawing/2014/main" id="{E43F25F8-8830-2ADF-8BEA-413B8EB48E88}"/>
+            </a:ext>
+          </a:extLst>
+        </p:cNvPr>
         <p:cNvGrpSpPr/>
         <p:nvPr/>
       </p:nvGrpSpPr>
@@ -11343,7 +12315,7 @@
           <p:cNvPr id="2" name="Titel 1">
             <a:extLst>
               <a:ext uri="{FF2B5EF4-FFF2-40B4-BE49-F238E27FC236}">
-                <a16:creationId xmlns:a16="http://schemas.microsoft.com/office/drawing/2014/main" id="{958CD3DB-67AA-5CC4-15DE-4DA36502F4F9}"/>
+                <a16:creationId xmlns:a16="http://schemas.microsoft.com/office/drawing/2014/main" id="{DB759FC8-667D-010C-554F-B7CEE94818A1}"/>
               </a:ext>
             </a:extLst>
           </p:cNvPr>
@@ -11361,57 +12333,61 @@
           <a:p>
             <a:r>
               <a:rPr lang="da-DK" dirty="0"/>
-              <a:t>Main </a:t>
-            </a:r>
-            <a:r>
-              <a:rPr lang="da-DK" dirty="0" err="1"/>
-              <a:t>results</a:t>
-            </a:r>
-            <a:endParaRPr lang="da-DK" dirty="0"/>
-          </a:p>
-        </p:txBody>
-      </p:sp>
-      <p:pic>
-        <p:nvPicPr>
-          <p:cNvPr id="6" name="Pladsholder til indhold 5" descr="Et billede, der indeholder tekst, skærmbillede, Farverigt, mønster&#10;&#10;AI-genereret indhold kan være ukorrekt.">
+              <a:t>Diffusion models</a:t>
+            </a:r>
+          </a:p>
+        </p:txBody>
+      </p:sp>
+      <p:sp>
+        <p:nvSpPr>
+          <p:cNvPr id="3" name="Pladsholder til indhold 2">
             <a:extLst>
               <a:ext uri="{FF2B5EF4-FFF2-40B4-BE49-F238E27FC236}">
-                <a16:creationId xmlns:a16="http://schemas.microsoft.com/office/drawing/2014/main" id="{825F58B0-C21A-9D2D-7655-7302687DF350}"/>
+                <a16:creationId xmlns:a16="http://schemas.microsoft.com/office/drawing/2014/main" id="{99738E36-3E9F-B018-76FB-444E587B926C}"/>
               </a:ext>
             </a:extLst>
           </p:cNvPr>
-          <p:cNvPicPr>
-            <a:picLocks noGrp="1" noChangeAspect="1"/>
-          </p:cNvPicPr>
+          <p:cNvSpPr>
+            <a:spLocks noGrp="1"/>
+          </p:cNvSpPr>
           <p:nvPr>
             <p:ph idx="1"/>
           </p:nvPr>
-        </p:nvPicPr>
-        <p:blipFill>
-          <a:blip r:embed="rId2" cstate="print">
-            <a:extLst>
-              <a:ext uri="{28A0092B-C50C-407E-A947-70E740481C1C}">
-                <a14:useLocalDpi xmlns:a14="http://schemas.microsoft.com/office/drawing/2010/main" val="0"/>
-              </a:ext>
-            </a:extLst>
-          </a:blip>
-          <a:stretch>
-            <a:fillRect/>
-          </a:stretch>
-        </p:blipFill>
-        <p:spPr>
-          <a:xfrm>
-            <a:off x="5475889" y="332656"/>
-            <a:ext cx="5574208" cy="5901854"/>
-          </a:xfrm>
-        </p:spPr>
-      </p:pic>
+        </p:nvSpPr>
+        <p:spPr/>
+        <p:txBody>
+          <a:bodyPr/>
+          <a:lstStyle/>
+          <a:p>
+            <a:pPr marL="342900" indent="-342900">
+              <a:buFont typeface="Arial" panose="020B0604020202020204" pitchFamily="34" charset="0"/>
+              <a:buChar char="•"/>
+            </a:pPr>
+            <a:r>
+              <a:rPr lang="da-DK" dirty="0" err="1"/>
+              <a:t>Especially</a:t>
+            </a:r>
+            <a:r>
+              <a:rPr lang="da-DK" dirty="0"/>
+              <a:t> for </a:t>
+            </a:r>
+            <a:r>
+              <a:rPr lang="da-DK" dirty="0" err="1"/>
+              <a:t>complex</a:t>
+            </a:r>
+            <a:r>
+              <a:rPr lang="da-DK" dirty="0"/>
+              <a:t> situations</a:t>
+            </a:r>
+          </a:p>
+        </p:txBody>
+      </p:sp>
       <p:sp>
         <p:nvSpPr>
           <p:cNvPr id="4" name="Pladsholder til dato 3">
             <a:extLst>
               <a:ext uri="{FF2B5EF4-FFF2-40B4-BE49-F238E27FC236}">
-                <a16:creationId xmlns:a16="http://schemas.microsoft.com/office/drawing/2014/main" id="{252A9DD3-49C7-D2B7-42DF-D5F1317CFDD8}"/>
+                <a16:creationId xmlns:a16="http://schemas.microsoft.com/office/drawing/2014/main" id="{8030AE1C-6E56-7FD1-C96D-72D042A8989E}"/>
               </a:ext>
             </a:extLst>
           </p:cNvPr>
@@ -11427,9 +12403,9 @@
           <a:bodyPr/>
           <a:lstStyle/>
           <a:p>
-            <a:fld id="{C8BF3C83-0AF9-414D-934B-968BE636E83C}" type="datetime1">
+            <a:fld id="{580A9012-99F9-450D-B679-F272DDE9E7FC}" type="datetime1">
               <a:rPr lang="da-DK" smtClean="0"/>
-              <a:t>03-06-2026</a:t>
+              <a:t>06-06-2026</a:t>
             </a:fld>
             <a:endParaRPr lang="da-DK" dirty="0"/>
           </a:p>
@@ -11438,7 +12414,7 @@
     </p:spTree>
     <p:extLst>
       <p:ext uri="{BB962C8B-B14F-4D97-AF65-F5344CB8AC3E}">
-        <p14:creationId xmlns:p14="http://schemas.microsoft.com/office/powerpoint/2010/main" val="52301074"/>
+        <p14:creationId xmlns:p14="http://schemas.microsoft.com/office/powerpoint/2010/main" val="783798407"/>
       </p:ext>
     </p:extLst>
   </p:cSld>
@@ -12402,19 +13378,19 @@
 </file>
 
 <file path=customXml/item1.xml><?xml version="1.0" encoding="utf-8"?>
-<TemplafySlideFormConfiguration><![CDATA[{"formFields":[],"formDataEntries":[]}]]></TemplafySlideFormConfiguration>
+<TemplafyTemplateConfiguration><![CDATA[{"elementsMetadata":[{"type":"shape","id":"65a04356-92b6-4a47-918e-78a50a76f164","elementConfiguration":{"binding":"{{FormatDateTime(Form.Date, \"d. MMMM yyyy\")}}","visibility":"","type":"text","disableUpdates":false}},{"type":"shape","id":"34bec9ce-27a1-41b7-9220-0f139f36445d","elementConfiguration":{"binding":"{{Form.EventOccasion}}","visibility":"","type":"text","disableUpdates":false}},{"type":"shape","id":"af76ede1-dd33-4b10-b8df-0a1c8dc4b0a6","elementConfiguration":{"binding":"{{Switch(UserProfile.DocumentLanguage.Language,\"da-DK\",UserProfile.Title,\"en-GB\",UserProfile.Title_EN,UserProfile.Title)}}","visibility":"","type":"text","disableUpdates":false}},{"type":"shape","id":"003efdc0-fa5f-41a3-b511-5e0eb11449c7","elementConfiguration":{"binding":"{{UserProfile.Name}}","visibility":"","type":"text","disableUpdates":false}},{"type":"shape","id":"d5e1fcf2-d2e7-4f04-a62e-ca95fb70fb04","elementConfiguration":{"inheritDimensions":"{{InheritDimensions.InheritNone}}","width":"4.61 cm","height":"1.55 cm","image":"{{UserProfile.UnitId.ExtraLogoRef.ImageRightAlignedRef.ImageFile}}","visibility":"","type":"image","disableUpdates":false}},{"type":"shape","id":"91499ec8-aec3-4d12-8320-346db94fb6d7","elementConfiguration":{"binding":"{{UserProfile.UnitId.Logo2}}","visibility":"","type":"text","disableUpdates":false}},{"type":"shape","id":"eada565a-e515-49e3-8e79-6fc20c12cb5a","elementConfiguration":{"binding":"{{UserProfile.UnitId.Logo1PowerPoint}}","visibility":"","type":"text","disableUpdates":false}},{"type":"shape","id":"d2c807bf-c20a-4e6d-a799-6fcff6951647","elementConfiguration":{"binding":"{{FormatDateTime(Form.Date, \"d. MMMM yyyy\")}}","visibility":"","type":"text","disableUpdates":false}},{"type":"shape","id":"a73d03e7-4f3f-4aa5-97fe-5cd33606c1c3","elementConfiguration":{"binding":"{{Form.EventOccasion}}","visibility":"","type":"text","disableUpdates":false}},{"type":"shape","id":"8af0f282-0d34-48a1-86b8-ed605fc649c7","elementConfiguration":{"inheritDimensions":"{{InheritDimensions.InheritNone}}","width":"4.61 cm","height":"1.55 cm","image":"{{UserProfile.UnitId.ExtraLogoRef.ImageRightAlignedNegRef.ImageFile}}","visibility":"","type":"image","disableUpdates":false}},{"type":"shape","id":"a807b095-5570-4fae-855d-6e3bdcf63943","elementConfiguration":{"binding":"{{UserProfile.UnitId.Logo2}}","visibility":"","type":"text","disableUpdates":false}},{"type":"shape","id":"6681ad5b-db83-4810-b13c-3cb68ee472ad","elementConfiguration":{"binding":"{{UserProfile.UnitId.Logo1PowerPoint}}","visibility":"","type":"text","disableUpdates":false}},{"type":"shape","id":"6f354c93-c798-4ba9-8ac3-fd677919f6d4","elementConfiguration":{"binding":"{{FormatDateTime(Form.Date, \"d. MMMM yyyy\")}}","visibility":"","type":"text","disableUpdates":false}},{"type":"shape","id":"1d1e319b-bee2-4df3-9881-3810f7297c02","elementConfiguration":{"binding":"{{Form.EventOccasion}}","visibility":"","type":"text","disableUpdates":false}},{"type":"shape","id":"4c0bec3a-e649-499b-a9a8-276547db97b5","elementConfiguration":{"binding":"{{UserProfile.Name}}","visibility":"","type":"text","disableUpdates":false}},{"type":"shape","id":"7b63a425-627c-4de1-973d-2cd70fe4e1ce","elementConfiguration":{"inheritDimensions":"{{InheritDimensions.InheritNone}}","width":"4.61 cm","height":"1.55 cm","image":"{{UserProfile.UnitId.ExtraLogoRef.ImageRightAlignedNegRef.ImageFile}}","visibility":"","type":"image","disableUpdates":false}},{"type":"shape","id":"5f7c3f31-b8cd-430b-a6c9-7f1b5ba6d31a","elementConfiguration":{"binding":"{{UserProfile.UnitId.Logo2}}","visibility":"","type":"text","disableUpdates":false}},{"type":"shape","id":"83e6068b-23fc-462f-b087-7e013c912135","elementConfiguration":{"binding":"{{UserProfile.UnitId.Logo1PowerPoint}}","visibility":"","type":"text","disableUpdates":false}},{"type":"shape","id":"8ab1cd0c-11c5-45fe-abeb-5bbaf2151f44","elementConfiguration":{"binding":"{{UserProfile.UnitId.Logo1PowerPoint}}","visibility":"","type":"text","disableUpdates":false}},{"type":"shape","id":"07caea8f-f210-46aa-b306-3076171569b2","elementConfiguration":{"binding":"{{FormatDateTime(Form.Date, \"d. MMMM yyyy\")}}","visibility":"","type":"text","disableUpdates":false}},{"type":"shape","id":"a8277224-1f32-4b13-9ad0-1f6f046b510f","elementConfiguration":{"binding":"{{Form.EventOccasion}}","visibility":"","type":"text","disableUpdates":false}},{"type":"shape","id":"b9093ede-f8a8-4f02-a984-c7acfb0628ee","elementConfiguration":{"binding":"{{Switch(UserProfile.DocumentLanguage.Language,\"da-DK\",UserProfile.Title,\"en-GB\",UserProfile.Title_EN,UserProfile.Title)}}","visibility":"","type":"text","disableUpdates":false}},{"type":"shape","id":"5b9ae2e7-b9c0-447e-82a2-c203a5209709","elementConfiguration":{"binding":"{{UserProfile.Name}}","visibility":"","type":"text","disableUpdates":false}},{"type":"shape","id":"8b3d44c0-608e-482e-94ab-265db9854a3f","elementConfiguration":{"inheritDimensions":"{{InheritDimensions.InheritNone}}","width":"4.61 cm","height":"1.55 cm","image":"{{UserProfile.UnitId.ExtraLogoRef.ImageRightAlignedNegRef.ImageFile}}","visibility":"","type":"image","disableUpdates":false}},{"type":"shape","id":"66da79b1-3c8e-4ecf-8cca-7f06e57a109c","elementConfiguration":{"binding":"{{UserProfile.UnitId.Logo2}}","visibility":"","type":"text","disableUpdates":false}},{"type":"shape","id":"792ceb35-74b2-4f4a-872c-6eda26ad0e3c","elementConfiguration":{"binding":"{{UserProfile.UnitId.Logo1PowerPoint}}","visibility":"","type":"text","disableUpdates":false}}],"transformationConfigurations":[{"language":"{{DocumentLanguage}}","disableUpdates":false,"type":"proofingLanguage"},{"colorTheme":"{{Form.ChooseColorTheme.ColorThemeRef.ColorTheme}}","disableUpdates":false,"originalColorThemeXml":"<a:clrScheme name=\"01 AU Blue\" xmlns:a=\"http://schemas.openxmlformats.org/drawingml/2006/main\"><a:dk1><a:srgbClr val=\"000000\" /></a:dk1><a:lt1><a:srgbClr val=\"FFFFFF\" /></a:lt1><a:dk2><a:srgbClr val=\"002546\" /></a:dk2><a:lt2><a:srgbClr val=\"002546\" /></a:lt2><a:accent1><a:srgbClr val=\"0A1449\" /></a:accent1><a:accent2><a:srgbClr val=\"183D83\" /></a:accent2><a:accent3><a:srgbClr val=\"87D1F4\" /></a:accent3><a:accent4><a:srgbClr val=\"33525F\" /></a:accent4><a:accent5><a:srgbClr val=\"548195\" /></a:accent5><a:accent6><a:srgbClr val=\"C6C6C6\" /></a:accent6><a:hlink><a:srgbClr val=\"03428E\" /></a:hlink><a:folHlink><a:srgbClr val=\"03428E\" /></a:folHlink></a:clrScheme>","type":"colorTheme"}],"templateName":"PowerPoint skabelon","templateDescription":"PowerPoint template 16:9 (convertible to 16:10 or 4:3)","enableDocumentContentUpdater":true,"version":"2.0"}]]></TemplafyTemplateConfiguration>
 </file>
 
 <file path=customXml/item10.xml><?xml version="1.0" encoding="utf-8"?>
-<TemplafyTemplateConfiguration><![CDATA[{"elementsMetadata":[{"type":"shape","id":"65a04356-92b6-4a47-918e-78a50a76f164","elementConfiguration":{"binding":"{{FormatDateTime(Form.Date, \"d. MMMM yyyy\")}}","visibility":"","type":"text","disableUpdates":false}},{"type":"shape","id":"34bec9ce-27a1-41b7-9220-0f139f36445d","elementConfiguration":{"binding":"{{Form.EventOccasion}}","visibility":"","type":"text","disableUpdates":false}},{"type":"shape","id":"af76ede1-dd33-4b10-b8df-0a1c8dc4b0a6","elementConfiguration":{"binding":"{{Switch(UserProfile.DocumentLanguage.Language,\"da-DK\",UserProfile.Title,\"en-GB\",UserProfile.Title_EN,UserProfile.Title)}}","visibility":"","type":"text","disableUpdates":false}},{"type":"shape","id":"003efdc0-fa5f-41a3-b511-5e0eb11449c7","elementConfiguration":{"binding":"{{UserProfile.Name}}","visibility":"","type":"text","disableUpdates":false}},{"type":"shape","id":"d5e1fcf2-d2e7-4f04-a62e-ca95fb70fb04","elementConfiguration":{"inheritDimensions":"{{InheritDimensions.InheritNone}}","width":"4.61 cm","height":"1.55 cm","image":"{{UserProfile.UnitId.ExtraLogoRef.ImageRightAlignedRef.ImageFile}}","visibility":"","type":"image","disableUpdates":false}},{"type":"shape","id":"91499ec8-aec3-4d12-8320-346db94fb6d7","elementConfiguration":{"binding":"{{UserProfile.UnitId.Logo2}}","visibility":"","type":"text","disableUpdates":false}},{"type":"shape","id":"eada565a-e515-49e3-8e79-6fc20c12cb5a","elementConfiguration":{"binding":"{{UserProfile.UnitId.Logo1PowerPoint}}","visibility":"","type":"text","disableUpdates":false}},{"type":"shape","id":"d2c807bf-c20a-4e6d-a799-6fcff6951647","elementConfiguration":{"binding":"{{FormatDateTime(Form.Date, \"d. MMMM yyyy\")}}","visibility":"","type":"text","disableUpdates":false}},{"type":"shape","id":"a73d03e7-4f3f-4aa5-97fe-5cd33606c1c3","elementConfiguration":{"binding":"{{Form.EventOccasion}}","visibility":"","type":"text","disableUpdates":false}},{"type":"shape","id":"8af0f282-0d34-48a1-86b8-ed605fc649c7","elementConfiguration":{"inheritDimensions":"{{InheritDimensions.InheritNone}}","width":"4.61 cm","height":"1.55 cm","image":"{{UserProfile.UnitId.ExtraLogoRef.ImageRightAlignedNegRef.ImageFile}}","visibility":"","type":"image","disableUpdates":false}},{"type":"shape","id":"a807b095-5570-4fae-855d-6e3bdcf63943","elementConfiguration":{"binding":"{{UserProfile.UnitId.Logo2}}","visibility":"","type":"text","disableUpdates":false}},{"type":"shape","id":"6681ad5b-db83-4810-b13c-3cb68ee472ad","elementConfiguration":{"binding":"{{UserProfile.UnitId.Logo1PowerPoint}}","visibility":"","type":"text","disableUpdates":false}},{"type":"shape","id":"6f354c93-c798-4ba9-8ac3-fd677919f6d4","elementConfiguration":{"binding":"{{FormatDateTime(Form.Date, \"d. MMMM yyyy\")}}","visibility":"","type":"text","disableUpdates":false}},{"type":"shape","id":"1d1e319b-bee2-4df3-9881-3810f7297c02","elementConfiguration":{"binding":"{{Form.EventOccasion}}","visibility":"","type":"text","disableUpdates":false}},{"type":"shape","id":"4c0bec3a-e649-499b-a9a8-276547db97b5","elementConfiguration":{"binding":"{{UserProfile.Name}}","visibility":"","type":"text","disableUpdates":false}},{"type":"shape","id":"7b63a425-627c-4de1-973d-2cd70fe4e1ce","elementConfiguration":{"inheritDimensions":"{{InheritDimensions.InheritNone}}","width":"4.61 cm","height":"1.55 cm","image":"{{UserProfile.UnitId.ExtraLogoRef.ImageRightAlignedNegRef.ImageFile}}","visibility":"","type":"image","disableUpdates":false}},{"type":"shape","id":"5f7c3f31-b8cd-430b-a6c9-7f1b5ba6d31a","elementConfiguration":{"binding":"{{UserProfile.UnitId.Logo2}}","visibility":"","type":"text","disableUpdates":false}},{"type":"shape","id":"83e6068b-23fc-462f-b087-7e013c912135","elementConfiguration":{"binding":"{{UserProfile.UnitId.Logo1PowerPoint}}","visibility":"","type":"text","disableUpdates":false}},{"type":"shape","id":"8ab1cd0c-11c5-45fe-abeb-5bbaf2151f44","elementConfiguration":{"binding":"{{UserProfile.UnitId.Logo1PowerPoint}}","visibility":"","type":"text","disableUpdates":false}},{"type":"shape","id":"07caea8f-f210-46aa-b306-3076171569b2","elementConfiguration":{"binding":"{{FormatDateTime(Form.Date, \"d. MMMM yyyy\")}}","visibility":"","type":"text","disableUpdates":false}},{"type":"shape","id":"a8277224-1f32-4b13-9ad0-1f6f046b510f","elementConfiguration":{"binding":"{{Form.EventOccasion}}","visibility":"","type":"text","disableUpdates":false}},{"type":"shape","id":"b9093ede-f8a8-4f02-a984-c7acfb0628ee","elementConfiguration":{"binding":"{{Switch(UserProfile.DocumentLanguage.Language,\"da-DK\",UserProfile.Title,\"en-GB\",UserProfile.Title_EN,UserProfile.Title)}}","visibility":"","type":"text","disableUpdates":false}},{"type":"shape","id":"5b9ae2e7-b9c0-447e-82a2-c203a5209709","elementConfiguration":{"binding":"{{UserProfile.Name}}","visibility":"","type":"text","disableUpdates":false}},{"type":"shape","id":"8b3d44c0-608e-482e-94ab-265db9854a3f","elementConfiguration":{"inheritDimensions":"{{InheritDimensions.InheritNone}}","width":"4.61 cm","height":"1.55 cm","image":"{{UserProfile.UnitId.ExtraLogoRef.ImageRightAlignedNegRef.ImageFile}}","visibility":"","type":"image","disableUpdates":false}},{"type":"shape","id":"66da79b1-3c8e-4ecf-8cca-7f06e57a109c","elementConfiguration":{"binding":"{{UserProfile.UnitId.Logo2}}","visibility":"","type":"text","disableUpdates":false}},{"type":"shape","id":"792ceb35-74b2-4f4a-872c-6eda26ad0e3c","elementConfiguration":{"binding":"{{UserProfile.UnitId.Logo1PowerPoint}}","visibility":"","type":"text","disableUpdates":false}}],"transformationConfigurations":[{"language":"{{DocumentLanguage}}","disableUpdates":false,"type":"proofingLanguage"},{"colorTheme":"{{Form.ChooseColorTheme.ColorThemeRef.ColorTheme}}","disableUpdates":false,"originalColorThemeXml":"<a:clrScheme name=\"01 AU Blue\" xmlns:a=\"http://schemas.openxmlformats.org/drawingml/2006/main\"><a:dk1><a:srgbClr val=\"000000\" /></a:dk1><a:lt1><a:srgbClr val=\"FFFFFF\" /></a:lt1><a:dk2><a:srgbClr val=\"002546\" /></a:dk2><a:lt2><a:srgbClr val=\"002546\" /></a:lt2><a:accent1><a:srgbClr val=\"0A1449\" /></a:accent1><a:accent2><a:srgbClr val=\"183D83\" /></a:accent2><a:accent3><a:srgbClr val=\"87D1F4\" /></a:accent3><a:accent4><a:srgbClr val=\"33525F\" /></a:accent4><a:accent5><a:srgbClr val=\"548195\" /></a:accent5><a:accent6><a:srgbClr val=\"C6C6C6\" /></a:accent6><a:hlink><a:srgbClr val=\"03428E\" /></a:hlink><a:folHlink><a:srgbClr val=\"03428E\" /></a:folHlink></a:clrScheme>","type":"colorTheme"}],"templateName":"PowerPoint skabelon","templateDescription":"PowerPoint template 16:9 (convertible to 16:10 or 4:3)","enableDocumentContentUpdater":true,"version":"2.0"}]]></TemplafyTemplateConfiguration>
+<TemplafySlideTemplateConfiguration><![CDATA[{"slideVersion":4,"isValidatorEnabled":false,"isLocked":false,"elementsMetadata":[],"slideId":"638344221285072627","enableDocumentContentUpdater":false,"version":"2.0"}]]></TemplafySlideTemplateConfiguration>
 </file>
 
 <file path=customXml/item11.xml><?xml version="1.0" encoding="utf-8"?>
-<TemplafySlideTemplateConfiguration><![CDATA[{"slideVersion":4,"isValidatorEnabled":false,"isLocked":false,"elementsMetadata":[],"slideId":"638344221285091994","enableDocumentContentUpdater":false,"version":"2.0"}]]></TemplafySlideTemplateConfiguration>
+<TemplafySlideTemplateConfiguration><![CDATA[{"slideVersion":4,"isValidatorEnabled":false,"isLocked":false,"elementsMetadata":[{"type":"shape","elementConfiguration":{"binding":"{{FormatDateTime(Form.Date, \"d. MMMM yyyy\")}}","visibility":"","type":"text","disableUpdates":false}},{"type":"shape","elementConfiguration":{"binding":"{{Form.EventOccasion}}","visibility":"","type":"text","disableUpdates":false}},{"type":"shape","elementConfiguration":{"binding":"{{Switch(UserProfile.DocumentLanguage.Language,\"da-DK\",UserProfile.Title,\"en-GB\",UserProfile.Title_EN,UserProfile.Title)}}","visibility":"","type":"text","disableUpdates":false}},{"type":"shape","elementConfiguration":{"binding":"{{UserProfile.Name}}","visibility":"","type":"text","disableUpdates":false}},{"type":"shape","elementConfiguration":{"inheritDimensions":"{{InheritDimensions.InheritNone}}","width":"4.61 cm","height":"1.55 cm","image":"{{UserProfile.UnitId.ExtraLogoRef.ImageRightAlignedNegRef.ImageFile}}","visibility":"","type":"image","disableUpdates":false}},{"type":"shape","elementConfiguration":{"binding":"{{UserProfile.UnitId.Logo2}}","visibility":"","type":"text","disableUpdates":false}},{"type":"shape","elementConfiguration":{"binding":"{{UserProfile.UnitId.Logo1PowerPoint}}","visibility":"","type":"text","disableUpdates":false}}],"slideId":"638344221284623770","enableDocumentContentUpdater":false,"version":"2.0"}]]></TemplafySlideTemplateConfiguration>
 </file>
 
 <file path=customXml/item12.xml><?xml version="1.0" encoding="utf-8"?>
-<TemplafySlideTemplateConfiguration><![CDATA[{"slideVersion":4,"isValidatorEnabled":false,"isLocked":false,"elementsMetadata":[],"slideId":"638344221285072627","enableDocumentContentUpdater":false,"version":"2.0"}]]></TemplafySlideTemplateConfiguration>
+<TemplafyFormConfiguration><![CDATA[{"formFields":[{"required":true,"helpTexts":{},"spacing":{},"shareValue":false,"type":"datePicker","name":"Date","label":"Date"},{"required":false,"placeholder":"","lines":1,"helpTexts":{},"spacing":{},"shareValue":false,"type":"textBox","name":"EventOccasion","label":"Event / Occasion"},{"distinct":false,"hideIfNoUserInteractionRequired":false,"required":false,"defaultValue":"Blå","autoSelectFirstOption":false,"helpTexts":{},"spacing":{},"shareValue":false,"type":"dropDown","dataSourceName":"ColorThemePowerPoint","dataSourceFieldName":"Name","name":"ChooseColorTheme","label":"Choose Color theme"}],"formDataEntries":[{"name":"Date","value":"kcacoUdsG20hIWwrFpZxAQ=="},{"name":"EventOccasion","value":"DTZAF4jv4hJkicHBWkjdVYsY9x2qnV1yaoBlETy0o0E="},{"name":"ChooseColorTheme","value":"XmRlVpWiose5Rf1eG6aJznCjkbXXnh6o3o1+21OmFqQ="}]}]]></TemplafyFormConfiguration>
 </file>
 
 <file path=customXml/item2.xml><?xml version="1.0" encoding="utf-8"?>
@@ -12426,11 +13402,11 @@
 </file>
 
 <file path=customXml/item4.xml><?xml version="1.0" encoding="utf-8"?>
-<TemplafySlideFormConfiguration><![CDATA[{"formFields":[],"formDataEntries":[]}]]></TemplafySlideFormConfiguration>
+<TemplafySlideTemplateConfiguration><![CDATA[{"slideVersion":4,"isValidatorEnabled":false,"isLocked":false,"elementsMetadata":[],"slideId":"638344221285091994","enableDocumentContentUpdater":false,"version":"2.0"}]]></TemplafySlideTemplateConfiguration>
 </file>
 
 <file path=customXml/item5.xml><?xml version="1.0" encoding="utf-8"?>
-<TemplafyFormConfiguration><![CDATA[{"formFields":[{"required":true,"helpTexts":{},"spacing":{},"shareValue":false,"type":"datePicker","name":"Date","label":"Date"},{"required":false,"placeholder":"","lines":1,"helpTexts":{},"spacing":{},"shareValue":false,"type":"textBox","name":"EventOccasion","label":"Event / Occasion"},{"distinct":false,"hideIfNoUserInteractionRequired":false,"required":false,"defaultValue":"Blå","autoSelectFirstOption":false,"helpTexts":{},"spacing":{},"shareValue":false,"type":"dropDown","dataSourceName":"ColorThemePowerPoint","dataSourceFieldName":"Name","name":"ChooseColorTheme","label":"Choose Color theme"}],"formDataEntries":[{"name":"Date","value":"kcacoUdsG20hIWwrFpZxAQ=="},{"name":"EventOccasion","value":"DTZAF4jv4hJkicHBWkjdVYsY9x2qnV1yaoBlETy0o0E="},{"name":"ChooseColorTheme","value":"XmRlVpWiose5Rf1eG6aJznCjkbXXnh6o3o1+21OmFqQ="}]}]]></TemplafyFormConfiguration>
+<TemplafySlideFormConfiguration><![CDATA[{"formFields":[],"formDataEntries":[]}]]></TemplafySlideFormConfiguration>
 </file>
 
 <file path=customXml/item6.xml><?xml version="1.0" encoding="utf-8"?>
@@ -12438,7 +13414,7 @@
 </file>
 
 <file path=customXml/item7.xml><?xml version="1.0" encoding="utf-8"?>
-<TemplafySlideTemplateConfiguration><![CDATA[{"slideVersion":4,"isValidatorEnabled":false,"isLocked":false,"elementsMetadata":[{"type":"shape","elementConfiguration":{"binding":"{{FormatDateTime(Form.Date, \"d. MMMM yyyy\")}}","visibility":"","type":"text","disableUpdates":false}},{"type":"shape","elementConfiguration":{"binding":"{{Form.EventOccasion}}","visibility":"","type":"text","disableUpdates":false}},{"type":"shape","elementConfiguration":{"binding":"{{Switch(UserProfile.DocumentLanguage.Language,\"da-DK\",UserProfile.Title,\"en-GB\",UserProfile.Title_EN,UserProfile.Title)}}","visibility":"","type":"text","disableUpdates":false}},{"type":"shape","elementConfiguration":{"binding":"{{UserProfile.Name}}","visibility":"","type":"text","disableUpdates":false}},{"type":"shape","elementConfiguration":{"inheritDimensions":"{{InheritDimensions.InheritNone}}","width":"4.61 cm","height":"1.55 cm","image":"{{UserProfile.UnitId.ExtraLogoRef.ImageRightAlignedNegRef.ImageFile}}","visibility":"","type":"image","disableUpdates":false}},{"type":"shape","elementConfiguration":{"binding":"{{UserProfile.UnitId.Logo2}}","visibility":"","type":"text","disableUpdates":false}},{"type":"shape","elementConfiguration":{"binding":"{{UserProfile.UnitId.Logo1PowerPoint}}","visibility":"","type":"text","disableUpdates":false}}],"slideId":"638344221284623770","enableDocumentContentUpdater":false,"version":"2.0"}]]></TemplafySlideTemplateConfiguration>
+<TemplafySlideTemplateConfiguration><![CDATA[{"slideVersion":4,"isValidatorEnabled":false,"isLocked":false,"elementsMetadata":[],"slideId":"638344221285055523","enableDocumentContentUpdater":false,"version":"2.0"}]]></TemplafySlideTemplateConfiguration>
 </file>
 
 <file path=customXml/item8.xml><?xml version="1.0" encoding="utf-8"?>
@@ -12446,29 +13422,29 @@
 </file>
 
 <file path=customXml/item9.xml><?xml version="1.0" encoding="utf-8"?>
-<TemplafySlideTemplateConfiguration><![CDATA[{"slideVersion":4,"isValidatorEnabled":false,"isLocked":false,"elementsMetadata":[],"slideId":"638344221285055523","enableDocumentContentUpdater":false,"version":"2.0"}]]></TemplafySlideTemplateConfiguration>
+<TemplafySlideFormConfiguration><![CDATA[{"formFields":[],"formDataEntries":[]}]]></TemplafySlideFormConfiguration>
 </file>
 
 <file path=customXml/itemProps1.xml><?xml version="1.0" encoding="utf-8"?>
-<ds:datastoreItem xmlns:ds="http://schemas.openxmlformats.org/officeDocument/2006/customXml" ds:itemID="{065744AD-6466-4C46-AE6F-83D8FBC1C1CF}">
+<ds:datastoreItem xmlns:ds="http://schemas.openxmlformats.org/officeDocument/2006/customXml" ds:itemID="{AFC86994-F0FF-421B-841D-005E37E2CB9C}">
   <ds:schemaRefs/>
 </ds:datastoreItem>
 </file>
 
 <file path=customXml/itemProps10.xml><?xml version="1.0" encoding="utf-8"?>
-<ds:datastoreItem xmlns:ds="http://schemas.openxmlformats.org/officeDocument/2006/customXml" ds:itemID="{AFC86994-F0FF-421B-841D-005E37E2CB9C}">
+<ds:datastoreItem xmlns:ds="http://schemas.openxmlformats.org/officeDocument/2006/customXml" ds:itemID="{3643F53D-29F6-46FD-9FF1-B40DF29295C1}">
   <ds:schemaRefs/>
 </ds:datastoreItem>
 </file>
 
 <file path=customXml/itemProps11.xml><?xml version="1.0" encoding="utf-8"?>
-<ds:datastoreItem xmlns:ds="http://schemas.openxmlformats.org/officeDocument/2006/customXml" ds:itemID="{D8EFAE61-AC68-4E39-9D00-2ECB552AF7C0}">
+<ds:datastoreItem xmlns:ds="http://schemas.openxmlformats.org/officeDocument/2006/customXml" ds:itemID="{B2CA2D4C-0385-4D99-AB8D-7792A88C817E}">
   <ds:schemaRefs/>
 </ds:datastoreItem>
 </file>
 
 <file path=customXml/itemProps12.xml><?xml version="1.0" encoding="utf-8"?>
-<ds:datastoreItem xmlns:ds="http://schemas.openxmlformats.org/officeDocument/2006/customXml" ds:itemID="{3643F53D-29F6-46FD-9FF1-B40DF29295C1}">
+<ds:datastoreItem xmlns:ds="http://schemas.openxmlformats.org/officeDocument/2006/customXml" ds:itemID="{7DA86E9B-4135-4144-9EBF-FD9F3AFEC348}">
   <ds:schemaRefs/>
 </ds:datastoreItem>
 </file>
@@ -12486,13 +13462,13 @@
 </file>
 
 <file path=customXml/itemProps4.xml><?xml version="1.0" encoding="utf-8"?>
-<ds:datastoreItem xmlns:ds="http://schemas.openxmlformats.org/officeDocument/2006/customXml" ds:itemID="{CDCAD78D-4B75-4D6D-A12C-4D7099050C85}">
+<ds:datastoreItem xmlns:ds="http://schemas.openxmlformats.org/officeDocument/2006/customXml" ds:itemID="{D8EFAE61-AC68-4E39-9D00-2ECB552AF7C0}">
   <ds:schemaRefs/>
 </ds:datastoreItem>
 </file>
 
 <file path=customXml/itemProps5.xml><?xml version="1.0" encoding="utf-8"?>
-<ds:datastoreItem xmlns:ds="http://schemas.openxmlformats.org/officeDocument/2006/customXml" ds:itemID="{7DA86E9B-4135-4144-9EBF-FD9F3AFEC348}">
+<ds:datastoreItem xmlns:ds="http://schemas.openxmlformats.org/officeDocument/2006/customXml" ds:itemID="{E6076CFF-B2D0-45B5-8D6B-A70E14E9B3D8}">
   <ds:schemaRefs/>
 </ds:datastoreItem>
 </file>
@@ -12504,19 +13480,19 @@
 </file>
 
 <file path=customXml/itemProps7.xml><?xml version="1.0" encoding="utf-8"?>
-<ds:datastoreItem xmlns:ds="http://schemas.openxmlformats.org/officeDocument/2006/customXml" ds:itemID="{B2CA2D4C-0385-4D99-AB8D-7792A88C817E}">
+<ds:datastoreItem xmlns:ds="http://schemas.openxmlformats.org/officeDocument/2006/customXml" ds:itemID="{3711B4B0-0534-4D87-9554-EE0E3A45C434}">
   <ds:schemaRefs/>
 </ds:datastoreItem>
 </file>
 
 <file path=customXml/itemProps8.xml><?xml version="1.0" encoding="utf-8"?>
-<ds:datastoreItem xmlns:ds="http://schemas.openxmlformats.org/officeDocument/2006/customXml" ds:itemID="{E6076CFF-B2D0-45B5-8D6B-A70E14E9B3D8}">
+<ds:datastoreItem xmlns:ds="http://schemas.openxmlformats.org/officeDocument/2006/customXml" ds:itemID="{CDCAD78D-4B75-4D6D-A12C-4D7099050C85}">
   <ds:schemaRefs/>
 </ds:datastoreItem>
 </file>
 
 <file path=customXml/itemProps9.xml><?xml version="1.0" encoding="utf-8"?>
-<ds:datastoreItem xmlns:ds="http://schemas.openxmlformats.org/officeDocument/2006/customXml" ds:itemID="{3711B4B0-0534-4D87-9554-EE0E3A45C434}">
+<ds:datastoreItem xmlns:ds="http://schemas.openxmlformats.org/officeDocument/2006/customXml" ds:itemID="{065744AD-6466-4C46-AE6F-83D8FBC1C1CF}">
   <ds:schemaRefs/>
 </ds:datastoreItem>
 </file>